--- a/presentation.pptx
+++ b/presentation.pptx
@@ -12,8 +12,6 @@
     <p:sldId id="260" r:id="rId11"/>
     <p:sldId id="261" r:id="rId12"/>
     <p:sldId id="262" r:id="rId13"/>
-    <p:sldId id="263" r:id="rId14"/>
-    <p:sldId id="264" r:id="rId15"/>
   </p:sldIdLst>
   <p:sldSz cx="12191695" cy="6858000" type="screen4x3"/>
   <p:notesSz cx="6858000" cy="9144000"/>
@@ -3112,8 +3110,8 @@
         </p:nvSpPr>
         <p:spPr>
           <a:xfrm>
-            <a:off x="1188720" y="1600200"/>
-            <a:ext cx="9875520" cy="1143000"/>
+            <a:off x="1280160" y="1645920"/>
+            <a:ext cx="9692640" cy="1188720"/>
           </a:xfrm>
           <a:prstGeom prst="rect">
             <a:avLst/>
@@ -3140,7 +3138,7 @@
           <a:p>
             <a:pPr algn="ctr">
               <a:spcAft>
-                <a:spcPts val="1800"/>
+                <a:spcPts val="1600"/>
               </a:spcAft>
             </a:pPr>
             <a:r>
@@ -3195,8 +3193,8 @@
         </p:nvSpPr>
         <p:spPr>
           <a:xfrm>
-            <a:off x="2011680" y="5166360"/>
-            <a:ext cx="8229600" cy="548640"/>
+            <a:off x="1645920" y="5212080"/>
+            <a:ext cx="8961120" cy="502920"/>
           </a:xfrm>
           <a:prstGeom prst="rect">
             <a:avLst/>
@@ -3217,7 +3215,7 @@
                 </a:solidFill>
                 <a:latin typeface="Helvetica Neue"/>
               </a:rPr>
-              <a:t>yanyu.li@northeastern.edu   |   scholar.google.com/citations?user=XUj8koUAAAAJ   |   github.com/liyy201912</a:t>
+              <a:t>li.yanyu@northeastern.edu   |   scholar.google.com/citations?user=XUj8koUAAAAJ   |   github.com/liyy201912</a:t>
             </a:r>
           </a:p>
         </p:txBody>
@@ -3256,8 +3254,8 @@
         </p:nvSpPr>
         <p:spPr>
           <a:xfrm>
-            <a:off x="731520" y="502920"/>
-            <a:ext cx="73152" cy="438912"/>
+            <a:off x="731520" y="512064"/>
+            <a:ext cx="73152" cy="457200"/>
           </a:xfrm>
           <a:prstGeom prst="rect">
             <a:avLst/>
@@ -3300,7 +3298,7 @@
         <p:spPr>
           <a:xfrm>
             <a:off x="987552" y="384048"/>
-            <a:ext cx="10241280" cy="594360"/>
+            <a:ext cx="10241280" cy="640080"/>
           </a:xfrm>
           <a:prstGeom prst="rect">
             <a:avLst/>
@@ -3320,7 +3318,7 @@
                 </a:solidFill>
                 <a:latin typeface="Helvetica Neue"/>
               </a:rPr>
-              <a:t>Research Profile</a:t>
+              <a:t>About Me</a:t>
             </a:r>
           </a:p>
           <a:p>
@@ -3330,13 +3328,13 @@
               </a:spcAft>
             </a:pPr>
             <a:r>
-              <a:rPr sz="1500" b="0">
+              <a:rPr sz="1400" b="0">
                 <a:solidFill>
                   <a:srgbClr val="6B7280"/>
                 </a:solidFill>
                 <a:latin typeface="Helvetica Neue"/>
               </a:rPr>
-              <a:t>Scientist working on efficient deep learning for vision, generative modeling, and deployment.</a:t>
+              <a:t>Bio, background, and current research focus.</a:t>
             </a:r>
           </a:p>
         </p:txBody>
@@ -3350,7 +3348,7 @@
         <p:spPr>
           <a:xfrm>
             <a:off x="914400" y="1234440"/>
-            <a:ext cx="6492240" cy="1508760"/>
+            <a:ext cx="6583680" cy="1965960"/>
           </a:xfrm>
           <a:prstGeom prst="rect">
             <a:avLst/>
@@ -3365,33 +3363,33 @@
           <a:p>
             <a:pPr>
               <a:spcAft>
-                <a:spcPts val="1200"/>
-              </a:spcAft>
-            </a:pPr>
-            <a:r>
-              <a:rPr sz="1800" b="0">
-                <a:solidFill>
-                  <a:srgbClr val="1F2937"/>
-                </a:solidFill>
-                <a:latin typeface="Helvetica Neue"/>
-              </a:rPr>
-              <a:t>My research focuses on translating state-of-the-art machine learning systems to mobile, edge, and hardware-constrained environments through efficient architecture design, compression, and algorithm-hardware co-design.</a:t>
-            </a:r>
-          </a:p>
-          <a:p>
-            <a:pPr algn="l">
-              <a:spcAft>
                 <a:spcPts val="1000"/>
               </a:spcAft>
             </a:pPr>
             <a:r>
-              <a:rPr sz="1500" b="0">
+              <a:rPr sz="1700" b="0">
+                <a:solidFill>
+                  <a:srgbClr val="1F2937"/>
+                </a:solidFill>
+                <a:latin typeface="Helvetica Neue"/>
+              </a:rPr>
+              <a:t>I am a researcher in efficient AI, working at the intersection of vision transformers, diffusion models, model compression, and hardware-aware deployment. My goal is to bring state-of-the-art machine learning systems to mobile and edge platforms without sacrificing accuracy, quality, or practicality.</a:t>
+            </a:r>
+          </a:p>
+          <a:p>
+            <a:pPr algn="l">
+              <a:spcAft>
+                <a:spcPts val="800"/>
+              </a:spcAft>
+            </a:pPr>
+            <a:r>
+              <a:rPr sz="1400" b="0">
                 <a:solidFill>
                   <a:srgbClr val="6B7280"/>
                 </a:solidFill>
                 <a:latin typeface="Helvetica Neue"/>
               </a:rPr>
-              <a:t>Research areas: efficient vision transformers, diffusion models, pruning, quantization, NAS, and on-device generative AI.</a:t>
+              <a:t>My work includes 59 publications, 2,963 citations, h-index 23, and 7 patents / patent applications, with papers at NeurIPS, CVPR, ICCV, ICLR, AAAI, IJCAI, ECCV, HPCA, FPGA, and FPL.</a:t>
             </a:r>
           </a:p>
           <a:p>
@@ -3401,13 +3399,13 @@
               </a:spcAft>
             </a:pPr>
             <a:r>
-              <a:rPr sz="1500" b="0">
+              <a:rPr sz="1400" b="0">
                 <a:solidFill>
                   <a:srgbClr val="6B7280"/>
                 </a:solidFill>
                 <a:latin typeface="Helvetica Neue"/>
               </a:rPr>
-              <a:t>Publications at NeurIPS, CVPR, ICCV, ICLR, AAAI, IJCAI, ECCV, HPCA, FPGA, and FPL.</a:t>
+              <a:t>Current interests: efficient vision backbones, mobile text-to-image and video generation, quantization, sparse training, neural architecture search, and algorithm-hardware co-design.</a:t>
             </a:r>
           </a:p>
         </p:txBody>
@@ -3420,8 +3418,8 @@
         </p:nvSpPr>
         <p:spPr>
           <a:xfrm>
-            <a:off x="7909560" y="1325880"/>
-            <a:ext cx="1783080" cy="960120"/>
+            <a:off x="7955279" y="1325880"/>
+            <a:ext cx="1554480" cy="914400"/>
           </a:xfrm>
           <a:prstGeom prst="roundRect">
             <a:avLst/>
@@ -3455,11 +3453,11 @@
           <a:p>
             <a:pPr algn="ctr">
               <a:spcBef>
-                <a:spcPts val="1000"/>
+                <a:spcPts val="800"/>
               </a:spcBef>
             </a:pPr>
             <a:r>
-              <a:rPr sz="2600" b="1">
+              <a:rPr sz="2400" b="1">
                 <a:solidFill>
                   <a:srgbClr val="2B6CB0"/>
                 </a:solidFill>
@@ -3471,7 +3469,7 @@
           <a:p>
             <a:pPr algn="ctr"/>
             <a:r>
-              <a:rPr sz="1200" b="0">
+              <a:rPr sz="1100" b="0">
                 <a:solidFill>
                   <a:srgbClr val="6B7280"/>
                 </a:solidFill>
@@ -3490,8 +3488,8 @@
         </p:nvSpPr>
         <p:spPr>
           <a:xfrm>
-            <a:off x="9875520" y="1325880"/>
-            <a:ext cx="1783080" cy="960120"/>
+            <a:off x="9692639" y="1325880"/>
+            <a:ext cx="1554480" cy="914400"/>
           </a:xfrm>
           <a:prstGeom prst="roundRect">
             <a:avLst/>
@@ -3525,11 +3523,11 @@
           <a:p>
             <a:pPr algn="ctr">
               <a:spcBef>
-                <a:spcPts val="1000"/>
+                <a:spcPts val="800"/>
               </a:spcBef>
             </a:pPr>
             <a:r>
-              <a:rPr sz="2600" b="1">
+              <a:rPr sz="2400" b="1">
                 <a:solidFill>
                   <a:srgbClr val="2B6CB0"/>
                 </a:solidFill>
@@ -3541,7 +3539,7 @@
           <a:p>
             <a:pPr algn="ctr"/>
             <a:r>
-              <a:rPr sz="1200" b="0">
+              <a:rPr sz="1100" b="0">
                 <a:solidFill>
                   <a:srgbClr val="6B7280"/>
                 </a:solidFill>
@@ -3560,8 +3558,8 @@
         </p:nvSpPr>
         <p:spPr>
           <a:xfrm>
-            <a:off x="7909560" y="2468880"/>
-            <a:ext cx="1783080" cy="960120"/>
+            <a:off x="7955279" y="2423160"/>
+            <a:ext cx="1554480" cy="914400"/>
           </a:xfrm>
           <a:prstGeom prst="roundRect">
             <a:avLst/>
@@ -3595,11 +3593,11 @@
           <a:p>
             <a:pPr algn="ctr">
               <a:spcBef>
-                <a:spcPts val="1000"/>
+                <a:spcPts val="800"/>
               </a:spcBef>
             </a:pPr>
             <a:r>
-              <a:rPr sz="2600" b="1">
+              <a:rPr sz="2400" b="1">
                 <a:solidFill>
                   <a:srgbClr val="2B6CB0"/>
                 </a:solidFill>
@@ -3611,7 +3609,7 @@
           <a:p>
             <a:pPr algn="ctr"/>
             <a:r>
-              <a:rPr sz="1200" b="0">
+              <a:rPr sz="1100" b="0">
                 <a:solidFill>
                   <a:srgbClr val="6B7280"/>
                 </a:solidFill>
@@ -3630,8 +3628,8 @@
         </p:nvSpPr>
         <p:spPr>
           <a:xfrm>
-            <a:off x="9875520" y="2468880"/>
-            <a:ext cx="1783080" cy="960120"/>
+            <a:off x="9692639" y="2423160"/>
+            <a:ext cx="1554480" cy="914400"/>
           </a:xfrm>
           <a:prstGeom prst="roundRect">
             <a:avLst/>
@@ -3665,11 +3663,11 @@
           <a:p>
             <a:pPr algn="ctr">
               <a:spcBef>
-                <a:spcPts val="1000"/>
+                <a:spcPts val="800"/>
               </a:spcBef>
             </a:pPr>
             <a:r>
-              <a:rPr sz="2600" b="1">
+              <a:rPr sz="2400" b="1">
                 <a:solidFill>
                   <a:srgbClr val="2B6CB0"/>
                 </a:solidFill>
@@ -3681,7 +3679,7 @@
           <a:p>
             <a:pPr algn="ctr"/>
             <a:r>
-              <a:rPr sz="1200" b="0">
+              <a:rPr sz="1100" b="0">
                 <a:solidFill>
                   <a:srgbClr val="6B7280"/>
                 </a:solidFill>
@@ -3700,8 +3698,8 @@
         </p:nvSpPr>
         <p:spPr>
           <a:xfrm>
-            <a:off x="914400" y="3063240"/>
-            <a:ext cx="4846320" cy="2331720"/>
+            <a:off x="914400" y="3566160"/>
+            <a:ext cx="5120640" cy="1920240"/>
           </a:xfrm>
           <a:prstGeom prst="roundRect">
             <a:avLst/>
@@ -3739,14 +3737,57 @@
       </p:sp>
       <p:sp>
         <p:nvSpPr>
-          <p:cNvPr id="10" name="TextBox 9"/>
+          <p:cNvPr id="10" name="Rectangle 9"/>
+          <p:cNvSpPr/>
+          <p:nvPr/>
+        </p:nvSpPr>
+        <p:spPr>
+          <a:xfrm>
+            <a:off x="914400" y="3566160"/>
+            <a:ext cx="54864" cy="1920240"/>
+          </a:xfrm>
+          <a:prstGeom prst="rect">
+            <a:avLst/>
+          </a:prstGeom>
+          <a:solidFill>
+            <a:srgbClr val="2B6CB0"/>
+          </a:solidFill>
+          <a:ln>
+            <a:noFill/>
+          </a:ln>
+        </p:spPr>
+        <p:style>
+          <a:lnRef idx="1">
+            <a:schemeClr val="accent1"/>
+          </a:lnRef>
+          <a:fillRef idx="3">
+            <a:schemeClr val="accent1"/>
+          </a:fillRef>
+          <a:effectRef idx="2">
+            <a:schemeClr val="accent1"/>
+          </a:effectRef>
+          <a:fontRef idx="minor">
+            <a:schemeClr val="lt1"/>
+          </a:fontRef>
+        </p:style>
+        <p:txBody>
+          <a:bodyPr rtlCol="0" anchor="ctr"/>
+          <a:lstStyle/>
+          <a:p>
+            <a:pPr algn="ctr"/>
+          </a:p>
+        </p:txBody>
+      </p:sp>
+      <p:sp>
+        <p:nvSpPr>
+          <p:cNvPr id="11" name="TextBox 10"/>
           <p:cNvSpPr txBox="1"/>
           <p:nvPr/>
         </p:nvSpPr>
         <p:spPr>
           <a:xfrm>
-            <a:off x="1115568" y="3227832"/>
-            <a:ext cx="4535424" cy="2075688"/>
+            <a:off x="1115568" y="3712464"/>
+            <a:ext cx="4828032" cy="1700784"/>
           </a:xfrm>
           <a:prstGeom prst="rect">
             <a:avLst/>
@@ -3787,7 +3828,7 @@
                 </a:solidFill>
                 <a:latin typeface="Helvetica Neue"/>
               </a:rPr>
-              <a:t>Ph.D. in Computer Engineering, Northeastern University (2019-2024)</a:t>
+              <a:t>• Ph.D. in Computer Engineering, Northeastern University (2019-2024); Advisor: Prof. Yanzhi Wang</a:t>
             </a:r>
           </a:p>
           <a:p>
@@ -3803,7 +3844,7 @@
                 </a:solidFill>
                 <a:latin typeface="Helvetica Neue"/>
               </a:rPr>
-              <a:t>Advisor: Prof. Yanzhi Wang</a:t>
+              <a:t>• M.S. in Mechanical Engineering (Robotics), Boston University (2017-2019)</a:t>
             </a:r>
           </a:p>
           <a:p>
@@ -3819,37 +3860,21 @@
                 </a:solidFill>
                 <a:latin typeface="Helvetica Neue"/>
               </a:rPr>
-              <a:t>M.S. in Mechanical Engineering (Robotics), Boston University (2017-2019)</a:t>
-            </a:r>
-          </a:p>
-          <a:p>
-            <a:pPr algn="l">
-              <a:spcAft>
-                <a:spcPts val="500"/>
-              </a:spcAft>
-            </a:pPr>
-            <a:r>
-              <a:rPr sz="1200" b="0">
-                <a:solidFill>
-                  <a:srgbClr val="6B7280"/>
-                </a:solidFill>
-                <a:latin typeface="Helvetica Neue"/>
-              </a:rPr>
-              <a:t>B.E. in Mechanical Engineering, Tsinghua University (2011-2015)</a:t>
-            </a:r>
-          </a:p>
-        </p:txBody>
-      </p:sp>
-      <p:sp>
-        <p:nvSpPr>
-          <p:cNvPr id="11" name="Rounded Rectangle 10"/>
+              <a:t>• B.E. in Mechanical Engineering, Tsinghua University (2011-2015)</a:t>
+            </a:r>
+          </a:p>
+        </p:txBody>
+      </p:sp>
+      <p:sp>
+        <p:nvSpPr>
+          <p:cNvPr id="12" name="Rounded Rectangle 11"/>
           <p:cNvSpPr/>
           <p:nvPr/>
         </p:nvSpPr>
         <p:spPr>
           <a:xfrm>
-            <a:off x="5989320" y="3063240"/>
-            <a:ext cx="2880360" cy="2331720"/>
+            <a:off x="6309360" y="3566160"/>
+            <a:ext cx="4983480" cy="1920240"/>
           </a:xfrm>
           <a:prstGeom prst="roundRect">
             <a:avLst/>
@@ -3887,14 +3912,57 @@
       </p:sp>
       <p:sp>
         <p:nvSpPr>
-          <p:cNvPr id="12" name="TextBox 11"/>
+          <p:cNvPr id="13" name="Rectangle 12"/>
+          <p:cNvSpPr/>
+          <p:nvPr/>
+        </p:nvSpPr>
+        <p:spPr>
+          <a:xfrm>
+            <a:off x="6309360" y="3566160"/>
+            <a:ext cx="54864" cy="1920240"/>
+          </a:xfrm>
+          <a:prstGeom prst="rect">
+            <a:avLst/>
+          </a:prstGeom>
+          <a:solidFill>
+            <a:srgbClr val="2F8559"/>
+          </a:solidFill>
+          <a:ln>
+            <a:noFill/>
+          </a:ln>
+        </p:spPr>
+        <p:style>
+          <a:lnRef idx="1">
+            <a:schemeClr val="accent1"/>
+          </a:lnRef>
+          <a:fillRef idx="3">
+            <a:schemeClr val="accent1"/>
+          </a:fillRef>
+          <a:effectRef idx="2">
+            <a:schemeClr val="accent1"/>
+          </a:effectRef>
+          <a:fontRef idx="minor">
+            <a:schemeClr val="lt1"/>
+          </a:fontRef>
+        </p:style>
+        <p:txBody>
+          <a:bodyPr rtlCol="0" anchor="ctr"/>
+          <a:lstStyle/>
+          <a:p>
+            <a:pPr algn="ctr"/>
+          </a:p>
+        </p:txBody>
+      </p:sp>
+      <p:sp>
+        <p:nvSpPr>
+          <p:cNvPr id="14" name="TextBox 13"/>
           <p:cNvSpPr txBox="1"/>
           <p:nvPr/>
         </p:nvSpPr>
         <p:spPr>
           <a:xfrm>
-            <a:off x="6190488" y="3227832"/>
-            <a:ext cx="2569464" cy="2075688"/>
+            <a:off x="6510528" y="3712464"/>
+            <a:ext cx="4690872" cy="1700784"/>
           </a:xfrm>
           <a:prstGeom prst="rect">
             <a:avLst/>
@@ -3919,7 +3987,7 @@
                 </a:solidFill>
                 <a:latin typeface="Helvetica Neue"/>
               </a:rPr>
-              <a:t>Experience</a:t>
+              <a:t>Experience Highlights</a:t>
             </a:r>
           </a:p>
           <a:p>
@@ -3935,7 +4003,7 @@
                 </a:solidFill>
                 <a:latin typeface="Helvetica Neue"/>
               </a:rPr>
-              <a:t>Snap Inc. research internships (2022-present)</a:t>
+              <a:t>• Snap Inc.: efficient diffusion models, mobile generative AI, and quality-aware text encoders</a:t>
             </a:r>
           </a:p>
           <a:p>
@@ -3951,7 +4019,7 @@
                 </a:solidFill>
                 <a:latin typeface="Helvetica Neue"/>
               </a:rPr>
-              <a:t>CoCoPIE LLC (2021)</a:t>
+              <a:t>• CoCoPIE LLC: algorithm-hardware co-design for compressed and quantized networks</a:t>
             </a:r>
           </a:p>
           <a:p>
@@ -3967,155 +4035,7 @@
                 </a:solidFill>
                 <a:latin typeface="Helvetica Neue"/>
               </a:rPr>
-              <a:t>Kuaishou Technology US R&amp;D (2020-2021)</a:t>
-            </a:r>
-          </a:p>
-        </p:txBody>
-      </p:sp>
-      <p:sp>
-        <p:nvSpPr>
-          <p:cNvPr id="13" name="Rounded Rectangle 12"/>
-          <p:cNvSpPr/>
-          <p:nvPr/>
-        </p:nvSpPr>
-        <p:spPr>
-          <a:xfrm>
-            <a:off x="9098280" y="3063240"/>
-            <a:ext cx="2148840" cy="2331720"/>
-          </a:xfrm>
-          <a:prstGeom prst="roundRect">
-            <a:avLst/>
-          </a:prstGeom>
-          <a:solidFill>
-            <a:srgbClr val="FAFBFD"/>
-          </a:solidFill>
-          <a:ln w="12700">
-            <a:solidFill>
-              <a:srgbClr val="E2E8F0"/>
-            </a:solidFill>
-          </a:ln>
-        </p:spPr>
-        <p:style>
-          <a:lnRef idx="1">
-            <a:schemeClr val="accent1"/>
-          </a:lnRef>
-          <a:fillRef idx="3">
-            <a:schemeClr val="accent1"/>
-          </a:fillRef>
-          <a:effectRef idx="2">
-            <a:schemeClr val="accent1"/>
-          </a:effectRef>
-          <a:fontRef idx="minor">
-            <a:schemeClr val="lt1"/>
-          </a:fontRef>
-        </p:style>
-        <p:txBody>
-          <a:bodyPr rtlCol="0" anchor="ctr"/>
-          <a:lstStyle/>
-          <a:p>
-            <a:pPr algn="ctr"/>
-          </a:p>
-        </p:txBody>
-      </p:sp>
-      <p:sp>
-        <p:nvSpPr>
-          <p:cNvPr id="14" name="TextBox 13"/>
-          <p:cNvSpPr txBox="1"/>
-          <p:nvPr/>
-        </p:nvSpPr>
-        <p:spPr>
-          <a:xfrm>
-            <a:off x="9299448" y="3227832"/>
-            <a:ext cx="1837944" cy="2075688"/>
-          </a:xfrm>
-          <a:prstGeom prst="rect">
-            <a:avLst/>
-          </a:prstGeom>
-          <a:noFill/>
-        </p:spPr>
-        <p:txBody>
-          <a:bodyPr wrap="square">
-            <a:spAutoFit/>
-          </a:bodyPr>
-          <a:lstStyle/>
-          <a:p>
-            <a:pPr>
-              <a:spcAft>
-                <a:spcPts val="800"/>
-              </a:spcAft>
-            </a:pPr>
-            <a:r>
-              <a:rPr sz="1800" b="1">
-                <a:solidFill>
-                  <a:srgbClr val="1A365D"/>
-                </a:solidFill>
-                <a:latin typeface="Helvetica Neue"/>
-              </a:rPr>
-              <a:t>Focus</a:t>
-            </a:r>
-          </a:p>
-          <a:p>
-            <a:pPr algn="l">
-              <a:spcAft>
-                <a:spcPts val="500"/>
-              </a:spcAft>
-            </a:pPr>
-            <a:r>
-              <a:rPr sz="1200" b="0">
-                <a:solidFill>
-                  <a:srgbClr val="6B7280"/>
-                </a:solidFill>
-                <a:latin typeface="Helvetica Neue"/>
-              </a:rPr>
-              <a:t>Mobile AI</a:t>
-            </a:r>
-          </a:p>
-          <a:p>
-            <a:pPr algn="l">
-              <a:spcAft>
-                <a:spcPts val="500"/>
-              </a:spcAft>
-            </a:pPr>
-            <a:r>
-              <a:rPr sz="1200" b="0">
-                <a:solidFill>
-                  <a:srgbClr val="6B7280"/>
-                </a:solidFill>
-                <a:latin typeface="Helvetica Neue"/>
-              </a:rPr>
-              <a:t>Generative models</a:t>
-            </a:r>
-          </a:p>
-          <a:p>
-            <a:pPr algn="l">
-              <a:spcAft>
-                <a:spcPts val="500"/>
-              </a:spcAft>
-            </a:pPr>
-            <a:r>
-              <a:rPr sz="1200" b="0">
-                <a:solidFill>
-                  <a:srgbClr val="6B7280"/>
-                </a:solidFill>
-                <a:latin typeface="Helvetica Neue"/>
-              </a:rPr>
-              <a:t>Efficient training</a:t>
-            </a:r>
-          </a:p>
-          <a:p>
-            <a:pPr algn="l">
-              <a:spcAft>
-                <a:spcPts val="500"/>
-              </a:spcAft>
-            </a:pPr>
-            <a:r>
-              <a:rPr sz="1200" b="0">
-                <a:solidFill>
-                  <a:srgbClr val="6B7280"/>
-                </a:solidFill>
-                <a:latin typeface="Helvetica Neue"/>
-              </a:rPr>
-              <a:t>Edge systems</a:t>
+              <a:t>• Kuaishou Technology: GAN compression and dynamic pruning</a:t>
             </a:r>
           </a:p>
         </p:txBody>
@@ -4154,8 +4074,8 @@
         </p:nvSpPr>
         <p:spPr>
           <a:xfrm>
-            <a:off x="731520" y="502920"/>
-            <a:ext cx="73152" cy="438912"/>
+            <a:off x="731520" y="512064"/>
+            <a:ext cx="73152" cy="457200"/>
           </a:xfrm>
           <a:prstGeom prst="rect">
             <a:avLst/>
@@ -4198,7 +4118,7 @@
         <p:spPr>
           <a:xfrm>
             <a:off x="987552" y="384048"/>
-            <a:ext cx="10241280" cy="594360"/>
+            <a:ext cx="10241280" cy="640080"/>
           </a:xfrm>
           <a:prstGeom prst="rect">
             <a:avLst/>
@@ -4218,7 +4138,7 @@
                 </a:solidFill>
                 <a:latin typeface="Helvetica Neue"/>
               </a:rPr>
-              <a:t>Research Program</a:t>
+              <a:t>Summary of Research Directions</a:t>
             </a:r>
           </a:p>
           <a:p>
@@ -4228,13 +4148,13 @@
               </a:spcAft>
             </a:pPr>
             <a:r>
-              <a:rPr sz="1500" b="0">
+              <a:rPr sz="1400" b="0">
                 <a:solidFill>
                   <a:srgbClr val="6B7280"/>
                 </a:solidFill>
                 <a:latin typeface="Helvetica Neue"/>
               </a:rPr>
-              <a:t>Three connected pillars that link efficient model design to practical deployment.</a:t>
+              <a:t>Three main directions organize the research portfolio.</a:t>
             </a:r>
           </a:p>
         </p:txBody>
@@ -4247,8 +4167,8 @@
         </p:nvSpPr>
         <p:spPr>
           <a:xfrm>
-            <a:off x="914400" y="1325880"/>
-            <a:ext cx="3429000" cy="4526280"/>
+            <a:off x="914400" y="1417320"/>
+            <a:ext cx="3429000" cy="4297680"/>
           </a:xfrm>
           <a:prstGeom prst="roundRect">
             <a:avLst/>
@@ -4292,8 +4212,8 @@
         </p:nvSpPr>
         <p:spPr>
           <a:xfrm>
-            <a:off x="914400" y="1325880"/>
-            <a:ext cx="54864" cy="4526280"/>
+            <a:off x="914400" y="1417320"/>
+            <a:ext cx="64008" cy="4297680"/>
           </a:xfrm>
           <a:prstGeom prst="rect">
             <a:avLst/>
@@ -4335,8 +4255,8 @@
         </p:nvSpPr>
         <p:spPr>
           <a:xfrm>
-            <a:off x="1133856" y="1490472"/>
-            <a:ext cx="3108960" cy="4270248"/>
+            <a:off x="1143000" y="1600200"/>
+            <a:ext cx="3099816" cy="4023360"/>
           </a:xfrm>
           <a:prstGeom prst="rect">
             <a:avLst/>
@@ -4355,7 +4275,7 @@
               </a:spcAft>
             </a:pPr>
             <a:r>
-              <a:rPr sz="1900" b="1">
+              <a:rPr sz="2000" b="1">
                 <a:solidFill>
                   <a:srgbClr val="1A365D"/>
                 </a:solidFill>
@@ -4367,7 +4287,7 @@
           <a:p>
             <a:pPr algn="l">
               <a:spcAft>
-                <a:spcPts val="500"/>
+                <a:spcPts val="1000"/>
               </a:spcAft>
             </a:pPr>
             <a:r>
@@ -4377,39 +4297,23 @@
                 </a:solidFill>
                 <a:latin typeface="Helvetica Neue"/>
               </a:rPr>
-              <a:t>• Transformer backbones tailored for mobile-scale latency and memory budgets.</a:t>
+              <a:t>Lightweight transformer backbones for recognition and dense prediction under mobile latency and memory constraints.</a:t>
             </a:r>
           </a:p>
           <a:p>
             <a:pPr algn="l">
               <a:spcAft>
-                <a:spcPts val="500"/>
+                <a:spcPts val="0"/>
               </a:spcAft>
             </a:pPr>
             <a:r>
-              <a:rPr sz="1300" b="0">
-                <a:solidFill>
-                  <a:srgbClr val="6B7280"/>
-                </a:solidFill>
-                <a:latin typeface="Helvetica Neue"/>
-              </a:rPr>
-              <a:t>• Design principles validated through EfficientFormer and EfficientFormerV2.</a:t>
-            </a:r>
-          </a:p>
-          <a:p>
-            <a:pPr algn="l">
-              <a:spcAft>
-                <a:spcPts val="500"/>
-              </a:spcAft>
-            </a:pPr>
-            <a:r>
-              <a:rPr sz="1300" b="0">
-                <a:solidFill>
-                  <a:srgbClr val="6B7280"/>
-                </a:solidFill>
-                <a:latin typeface="Helvetica Neue"/>
-              </a:rPr>
-              <a:t>• Applications extend to classification, segmentation, and edge perception.</a:t>
+              <a:rPr sz="1200" b="1">
+                <a:solidFill>
+                  <a:srgbClr val="2B6CB0"/>
+                </a:solidFill>
+                <a:latin typeface="Helvetica Neue"/>
+              </a:rPr>
+              <a:t>Representative work: EfficientFormer, EfficientFormerV2, Pruning-as-Search</a:t>
             </a:r>
           </a:p>
         </p:txBody>
@@ -4422,8 +4326,8 @@
         </p:nvSpPr>
         <p:spPr>
           <a:xfrm>
-            <a:off x="4526280" y="1325880"/>
-            <a:ext cx="3429000" cy="4526280"/>
+            <a:off x="4526280" y="1417320"/>
+            <a:ext cx="3429000" cy="4297680"/>
           </a:xfrm>
           <a:prstGeom prst="roundRect">
             <a:avLst/>
@@ -4467,8 +4371,8 @@
         </p:nvSpPr>
         <p:spPr>
           <a:xfrm>
-            <a:off x="4526280" y="1325880"/>
-            <a:ext cx="54864" cy="4526280"/>
+            <a:off x="4526280" y="1417320"/>
+            <a:ext cx="64008" cy="4297680"/>
           </a:xfrm>
           <a:prstGeom prst="rect">
             <a:avLst/>
@@ -4510,8 +4414,8 @@
         </p:nvSpPr>
         <p:spPr>
           <a:xfrm>
-            <a:off x="4745736" y="1490472"/>
-            <a:ext cx="3108960" cy="4270248"/>
+            <a:off x="4754880" y="1600200"/>
+            <a:ext cx="3099816" cy="4023360"/>
           </a:xfrm>
           <a:prstGeom prst="rect">
             <a:avLst/>
@@ -4530,7 +4434,7 @@
               </a:spcAft>
             </a:pPr>
             <a:r>
-              <a:rPr sz="1900" b="1">
+              <a:rPr sz="2000" b="1">
                 <a:solidFill>
                   <a:srgbClr val="1A365D"/>
                 </a:solidFill>
@@ -4542,7 +4446,7 @@
           <a:p>
             <a:pPr algn="l">
               <a:spcAft>
-                <a:spcPts val="500"/>
+                <a:spcPts val="1000"/>
               </a:spcAft>
             </a:pPr>
             <a:r>
@@ -4552,39 +4456,23 @@
                 </a:solidFill>
                 <a:latin typeface="Helvetica Neue"/>
               </a:rPr>
-              <a:t>• Fast text-to-image and video generation for mobile and edge devices.</a:t>
+              <a:t>Fast and practical text-to-image and video generation with improvements in quality control, acceleration, and compression.</a:t>
             </a:r>
           </a:p>
           <a:p>
             <a:pPr algn="l">
               <a:spcAft>
-                <a:spcPts val="500"/>
+                <a:spcPts val="0"/>
               </a:spcAft>
             </a:pPr>
             <a:r>
-              <a:rPr sz="1300" b="0">
-                <a:solidFill>
-                  <a:srgbClr val="6B7280"/>
-                </a:solidFill>
-                <a:latin typeface="Helvetica Neue"/>
-              </a:rPr>
-              <a:t>• Quality-control techniques via text encoders, distillation, and efficient sampling.</a:t>
-            </a:r>
-          </a:p>
-          <a:p>
-            <a:pPr algn="l">
-              <a:spcAft>
-                <a:spcPts val="500"/>
-              </a:spcAft>
-            </a:pPr>
-            <a:r>
-              <a:rPr sz="1300" b="0">
-                <a:solidFill>
-                  <a:srgbClr val="6B7280"/>
-                </a:solidFill>
-                <a:latin typeface="Helvetica Neue"/>
-              </a:rPr>
-              <a:t>• Compression-aware generative modeling including ultra-low-bit diffusion.</a:t>
+              <a:rPr sz="1200" b="1">
+                <a:solidFill>
+                  <a:srgbClr val="2F8559"/>
+                </a:solidFill>
+                <a:latin typeface="Helvetica Neue"/>
+              </a:rPr>
+              <a:t>Representative work: SnapFusion, TextCraftor, BitsFusion</a:t>
             </a:r>
           </a:p>
         </p:txBody>
@@ -4597,8 +4485,8 @@
         </p:nvSpPr>
         <p:spPr>
           <a:xfrm>
-            <a:off x="8138160" y="1325880"/>
-            <a:ext cx="3154680" cy="4526280"/>
+            <a:off x="8138160" y="1417320"/>
+            <a:ext cx="3154680" cy="4297680"/>
           </a:xfrm>
           <a:prstGeom prst="roundRect">
             <a:avLst/>
@@ -4642,8 +4530,8 @@
         </p:nvSpPr>
         <p:spPr>
           <a:xfrm>
-            <a:off x="8138160" y="1325880"/>
-            <a:ext cx="54864" cy="4526280"/>
+            <a:off x="8138160" y="1417320"/>
+            <a:ext cx="64008" cy="4297680"/>
           </a:xfrm>
           <a:prstGeom prst="rect">
             <a:avLst/>
@@ -4685,8 +4573,8 @@
         </p:nvSpPr>
         <p:spPr>
           <a:xfrm>
-            <a:off x="8357616" y="1490472"/>
-            <a:ext cx="2834640" cy="4270248"/>
+            <a:off x="8366760" y="1600200"/>
+            <a:ext cx="2825496" cy="4023360"/>
           </a:xfrm>
           <a:prstGeom prst="rect">
             <a:avLst/>
@@ -4705,7 +4593,7 @@
               </a:spcAft>
             </a:pPr>
             <a:r>
-              <a:rPr sz="1900" b="1">
+              <a:rPr sz="2000" b="1">
                 <a:solidFill>
                   <a:srgbClr val="1A365D"/>
                 </a:solidFill>
@@ -4717,7 +4605,7 @@
           <a:p>
             <a:pPr algn="l">
               <a:spcAft>
-                <a:spcPts val="500"/>
+                <a:spcPts val="1000"/>
               </a:spcAft>
             </a:pPr>
             <a:r>
@@ -4727,39 +4615,23 @@
                 </a:solidFill>
                 <a:latin typeface="Helvetica Neue"/>
               </a:rPr>
-              <a:t>• Quantization, pruning, sparse training, and neural architecture search.</a:t>
+              <a:t>Quantization, sparse training, FPGA acceleration, and deployment-oriented model design.</a:t>
             </a:r>
           </a:p>
           <a:p>
             <a:pPr algn="l">
               <a:spcAft>
-                <a:spcPts val="500"/>
+                <a:spcPts val="0"/>
               </a:spcAft>
             </a:pPr>
             <a:r>
-              <a:rPr sz="1300" b="0">
-                <a:solidFill>
-                  <a:srgbClr val="6B7280"/>
-                </a:solidFill>
-                <a:latin typeface="Helvetica Neue"/>
-              </a:rPr>
-              <a:t>• Algorithm-hardware co-design for phones, edge accelerators, and FPGAs.</a:t>
-            </a:r>
-          </a:p>
-          <a:p>
-            <a:pPr algn="l">
-              <a:spcAft>
-                <a:spcPts val="500"/>
-              </a:spcAft>
-            </a:pPr>
-            <a:r>
-              <a:rPr sz="1300" b="0">
-                <a:solidFill>
-                  <a:srgbClr val="6B7280"/>
-                </a:solidFill>
-                <a:latin typeface="Helvetica Neue"/>
-              </a:rPr>
-              <a:t>• Real-world deployment emphasis: latency, memory, and energy efficiency.</a:t>
+              <a:rPr sz="1200" b="1">
+                <a:solidFill>
+                  <a:srgbClr val="734AB8"/>
+                </a:solidFill>
+                <a:latin typeface="Helvetica Neue"/>
+              </a:rPr>
+              <a:t>Representative work: Mix and Match, FILM-QNN, Auto-ViT-Acc</a:t>
             </a:r>
           </a:p>
         </p:txBody>
@@ -4798,8 +4670,8 @@
         </p:nvSpPr>
         <p:spPr>
           <a:xfrm>
-            <a:off x="731520" y="502920"/>
-            <a:ext cx="73152" cy="438912"/>
+            <a:off x="731520" y="512064"/>
+            <a:ext cx="73152" cy="457200"/>
           </a:xfrm>
           <a:prstGeom prst="rect">
             <a:avLst/>
@@ -4842,7 +4714,7 @@
         <p:spPr>
           <a:xfrm>
             <a:off x="987552" y="384048"/>
-            <a:ext cx="10241280" cy="594360"/>
+            <a:ext cx="10241280" cy="640080"/>
           </a:xfrm>
           <a:prstGeom prst="rect">
             <a:avLst/>
@@ -4862,7 +4734,7 @@
                 </a:solidFill>
                 <a:latin typeface="Helvetica Neue"/>
               </a:rPr>
-              <a:t>Selected Contributions: Efficient Vision Transformers</a:t>
+              <a:t>Direction 1: Efficient Vision Transformers</a:t>
             </a:r>
           </a:p>
           <a:p>
@@ -4872,13 +4744,13 @@
               </a:spcAft>
             </a:pPr>
             <a:r>
-              <a:rPr sz="1500" b="0">
+              <a:rPr sz="1400" b="0">
                 <a:solidFill>
                   <a:srgbClr val="6B7280"/>
                 </a:solidFill>
                 <a:latin typeface="Helvetica Neue"/>
               </a:rPr>
-              <a:t>Representative first-author work on mobile-speed visual transformers and efficient deployment.</a:t>
+              <a:t>Most cited and representative work on mobile-speed visual architectures.</a:t>
             </a:r>
           </a:p>
         </p:txBody>
@@ -4892,182 +4764,7 @@
         <p:spPr>
           <a:xfrm>
             <a:off x="914400" y="1325880"/>
-            <a:ext cx="2834640" cy="4572000"/>
-          </a:xfrm>
-          <a:prstGeom prst="roundRect">
-            <a:avLst/>
-          </a:prstGeom>
-          <a:solidFill>
-            <a:srgbClr val="FAFBFD"/>
-          </a:solidFill>
-          <a:ln w="12700">
-            <a:solidFill>
-              <a:srgbClr val="E2E8F0"/>
-            </a:solidFill>
-          </a:ln>
-        </p:spPr>
-        <p:style>
-          <a:lnRef idx="1">
-            <a:schemeClr val="accent1"/>
-          </a:lnRef>
-          <a:fillRef idx="3">
-            <a:schemeClr val="accent1"/>
-          </a:fillRef>
-          <a:effectRef idx="2">
-            <a:schemeClr val="accent1"/>
-          </a:effectRef>
-          <a:fontRef idx="minor">
-            <a:schemeClr val="lt1"/>
-          </a:fontRef>
-        </p:style>
-        <p:txBody>
-          <a:bodyPr rtlCol="0" anchor="ctr"/>
-          <a:lstStyle/>
-          <a:p>
-            <a:pPr algn="ctr"/>
-          </a:p>
-        </p:txBody>
-      </p:sp>
-      <p:sp>
-        <p:nvSpPr>
-          <p:cNvPr id="5" name="Rectangle 4"/>
-          <p:cNvSpPr/>
-          <p:nvPr/>
-        </p:nvSpPr>
-        <p:spPr>
-          <a:xfrm>
-            <a:off x="914400" y="1325880"/>
-            <a:ext cx="54864" cy="4572000"/>
-          </a:xfrm>
-          <a:prstGeom prst="rect">
-            <a:avLst/>
-          </a:prstGeom>
-          <a:solidFill>
-            <a:srgbClr val="2B6CB0"/>
-          </a:solidFill>
-          <a:ln>
-            <a:noFill/>
-          </a:ln>
-        </p:spPr>
-        <p:style>
-          <a:lnRef idx="1">
-            <a:schemeClr val="accent1"/>
-          </a:lnRef>
-          <a:fillRef idx="3">
-            <a:schemeClr val="accent1"/>
-          </a:fillRef>
-          <a:effectRef idx="2">
-            <a:schemeClr val="accent1"/>
-          </a:effectRef>
-          <a:fontRef idx="minor">
-            <a:schemeClr val="lt1"/>
-          </a:fontRef>
-        </p:style>
-        <p:txBody>
-          <a:bodyPr rtlCol="0" anchor="ctr"/>
-          <a:lstStyle/>
-          <a:p>
-            <a:pPr algn="ctr"/>
-          </a:p>
-        </p:txBody>
-      </p:sp>
-      <p:sp>
-        <p:nvSpPr>
-          <p:cNvPr id="6" name="TextBox 5"/>
-          <p:cNvSpPr txBox="1"/>
-          <p:nvPr/>
-        </p:nvSpPr>
-        <p:spPr>
-          <a:xfrm>
-            <a:off x="1133856" y="1490472"/>
-            <a:ext cx="2514600" cy="4315968"/>
-          </a:xfrm>
-          <a:prstGeom prst="rect">
-            <a:avLst/>
-          </a:prstGeom>
-          <a:noFill/>
-        </p:spPr>
-        <p:txBody>
-          <a:bodyPr wrap="square">
-            <a:spAutoFit/>
-          </a:bodyPr>
-          <a:lstStyle/>
-          <a:p>
-            <a:pPr>
-              <a:spcAft>
-                <a:spcPts val="800"/>
-              </a:spcAft>
-            </a:pPr>
-            <a:r>
-              <a:rPr sz="1900" b="1">
-                <a:solidFill>
-                  <a:srgbClr val="1A365D"/>
-                </a:solidFill>
-                <a:latin typeface="Helvetica Neue"/>
-              </a:rPr>
-              <a:t>Key Outcomes</a:t>
-            </a:r>
-          </a:p>
-          <a:p>
-            <a:pPr algn="l">
-              <a:spcAft>
-                <a:spcPts val="500"/>
-              </a:spcAft>
-            </a:pPr>
-            <a:r>
-              <a:rPr sz="1300" b="0">
-                <a:solidFill>
-                  <a:srgbClr val="6B7280"/>
-                </a:solidFill>
-                <a:latin typeface="Helvetica Neue"/>
-              </a:rPr>
-              <a:t>• Showed that transformer backbones can achieve MobileNet-class latency on mobile hardware.</a:t>
-            </a:r>
-          </a:p>
-          <a:p>
-            <a:pPr algn="l">
-              <a:spcAft>
-                <a:spcPts val="500"/>
-              </a:spcAft>
-            </a:pPr>
-            <a:r>
-              <a:rPr sz="1300" b="0">
-                <a:solidFill>
-                  <a:srgbClr val="6B7280"/>
-                </a:solidFill>
-                <a:latin typeface="Helvetica Neue"/>
-              </a:rPr>
-              <a:t>• Enabled approximately 1 ms image recognition on smartphones in industrial deployment settings.</a:t>
-            </a:r>
-          </a:p>
-          <a:p>
-            <a:pPr algn="l">
-              <a:spcAft>
-                <a:spcPts val="500"/>
-              </a:spcAft>
-            </a:pPr>
-            <a:r>
-              <a:rPr sz="1300" b="0">
-                <a:solidFill>
-                  <a:srgbClr val="6B7280"/>
-                </a:solidFill>
-                <a:latin typeface="Helvetica Neue"/>
-              </a:rPr>
-              <a:t>• Extended efficient design ideas to segmentation and search-based architecture optimization.</a:t>
-            </a:r>
-          </a:p>
-        </p:txBody>
-      </p:sp>
-      <p:sp>
-        <p:nvSpPr>
-          <p:cNvPr id="7" name="Rounded Rectangle 6"/>
-          <p:cNvSpPr/>
-          <p:nvPr/>
-        </p:nvSpPr>
-        <p:spPr>
-          <a:xfrm>
-            <a:off x="3977639" y="1417320"/>
-            <a:ext cx="3383280" cy="1828800"/>
+            <a:ext cx="10378440" cy="1298448"/>
           </a:xfrm>
           <a:prstGeom prst="roundRect">
             <a:avLst/>
@@ -5105,14 +4802,57 @@
       </p:sp>
       <p:sp>
         <p:nvSpPr>
-          <p:cNvPr id="8" name="TextBox 7"/>
+          <p:cNvPr id="5" name="Rectangle 4"/>
+          <p:cNvSpPr/>
+          <p:nvPr/>
+        </p:nvSpPr>
+        <p:spPr>
+          <a:xfrm>
+            <a:off x="914400" y="1325880"/>
+            <a:ext cx="54864" cy="1298448"/>
+          </a:xfrm>
+          <a:prstGeom prst="rect">
+            <a:avLst/>
+          </a:prstGeom>
+          <a:solidFill>
+            <a:srgbClr val="2B6CB0"/>
+          </a:solidFill>
+          <a:ln>
+            <a:noFill/>
+          </a:ln>
+        </p:spPr>
+        <p:style>
+          <a:lnRef idx="1">
+            <a:schemeClr val="accent1"/>
+          </a:lnRef>
+          <a:fillRef idx="3">
+            <a:schemeClr val="accent1"/>
+          </a:fillRef>
+          <a:effectRef idx="2">
+            <a:schemeClr val="accent1"/>
+          </a:effectRef>
+          <a:fontRef idx="minor">
+            <a:schemeClr val="lt1"/>
+          </a:fontRef>
+        </p:style>
+        <p:txBody>
+          <a:bodyPr rtlCol="0" anchor="ctr"/>
+          <a:lstStyle/>
+          <a:p>
+            <a:pPr algn="ctr"/>
+          </a:p>
+        </p:txBody>
+      </p:sp>
+      <p:sp>
+        <p:nvSpPr>
+          <p:cNvPr id="6" name="TextBox 5"/>
           <p:cNvSpPr txBox="1"/>
           <p:nvPr/>
         </p:nvSpPr>
         <p:spPr>
           <a:xfrm>
-            <a:off x="4178807" y="1527048"/>
-            <a:ext cx="3072384" cy="1645920"/>
+            <a:off x="1133856" y="1435608"/>
+            <a:ext cx="10049256" cy="1115568"/>
           </a:xfrm>
           <a:prstGeom prst="rect">
             <a:avLst/>
@@ -5127,11 +4867,11 @@
           <a:p>
             <a:pPr>
               <a:spcAft>
-                <a:spcPts val="200"/>
+                <a:spcPts val="100"/>
               </a:spcAft>
             </a:pPr>
             <a:r>
-              <a:rPr sz="1500" b="1">
+              <a:rPr sz="1600" b="1">
                 <a:solidFill>
                   <a:srgbClr val="1A365D"/>
                 </a:solidFill>
@@ -5147,43 +4887,59 @@
               </a:spcAft>
             </a:pPr>
             <a:r>
-              <a:rPr sz="1200" b="0">
-                <a:solidFill>
-                  <a:srgbClr val="6B7280"/>
-                </a:solidFill>
-                <a:latin typeface="Helvetica Neue"/>
-              </a:rPr>
-              <a:t>Dimension-consistent transformer design for strong accuracy with mobile-scale inference speed.</a:t>
+              <a:rPr sz="1100" b="1">
+                <a:solidFill>
+                  <a:srgbClr val="2B6CB0"/>
+                </a:solidFill>
+                <a:latin typeface="Helvetica Neue"/>
+              </a:rPr>
+              <a:t>NeurIPS 2022  |  764 citations</a:t>
             </a:r>
           </a:p>
           <a:p>
             <a:pPr algn="l">
               <a:spcAft>
-                <a:spcPts val="0"/>
+                <a:spcPts val="300"/>
               </a:spcAft>
             </a:pPr>
             <a:r>
-              <a:rPr sz="1100" b="1">
-                <a:solidFill>
-                  <a:srgbClr val="2B6CB0"/>
-                </a:solidFill>
-                <a:latin typeface="Helvetica Neue"/>
-              </a:rPr>
-              <a:t>NeurIPS 2022  |  764 citations</a:t>
-            </a:r>
-          </a:p>
-        </p:txBody>
-      </p:sp>
-      <p:sp>
-        <p:nvSpPr>
-          <p:cNvPr id="9" name="Rounded Rectangle 8"/>
+              <a:rPr sz="1100" b="0">
+                <a:solidFill>
+                  <a:srgbClr val="6B7280"/>
+                </a:solidFill>
+                <a:latin typeface="Helvetica Neue"/>
+              </a:rPr>
+              <a:t>• Proposed a dimension-consistent meta-block design that removes mobile-unfriendly transformer components while preserving strong accuracy.</a:t>
+            </a:r>
+          </a:p>
+          <a:p>
+            <a:pPr algn="l">
+              <a:spcAft>
+                <a:spcPts val="300"/>
+              </a:spcAft>
+            </a:pPr>
+            <a:r>
+              <a:rPr sz="1100" b="0">
+                <a:solidFill>
+                  <a:srgbClr val="6B7280"/>
+                </a:solidFill>
+                <a:latin typeface="Helvetica Neue"/>
+              </a:rPr>
+              <a:t>• Showed that vision transformers can operate at MobileNet-class speed on real mobile devices, making transformer deployment practical.</a:t>
+            </a:r>
+          </a:p>
+        </p:txBody>
+      </p:sp>
+      <p:sp>
+        <p:nvSpPr>
+          <p:cNvPr id="7" name="Rounded Rectangle 6"/>
           <p:cNvSpPr/>
           <p:nvPr/>
         </p:nvSpPr>
         <p:spPr>
           <a:xfrm>
-            <a:off x="7589520" y="1417320"/>
-            <a:ext cx="3383280" cy="1828800"/>
+            <a:off x="914400" y="2788920"/>
+            <a:ext cx="10378440" cy="1298448"/>
           </a:xfrm>
           <a:prstGeom prst="roundRect">
             <a:avLst/>
@@ -5221,14 +4977,57 @@
       </p:sp>
       <p:sp>
         <p:nvSpPr>
-          <p:cNvPr id="10" name="TextBox 9"/>
+          <p:cNvPr id="8" name="Rectangle 7"/>
+          <p:cNvSpPr/>
+          <p:nvPr/>
+        </p:nvSpPr>
+        <p:spPr>
+          <a:xfrm>
+            <a:off x="914400" y="2788920"/>
+            <a:ext cx="54864" cy="1298448"/>
+          </a:xfrm>
+          <a:prstGeom prst="rect">
+            <a:avLst/>
+          </a:prstGeom>
+          <a:solidFill>
+            <a:srgbClr val="2B6CB0"/>
+          </a:solidFill>
+          <a:ln>
+            <a:noFill/>
+          </a:ln>
+        </p:spPr>
+        <p:style>
+          <a:lnRef idx="1">
+            <a:schemeClr val="accent1"/>
+          </a:lnRef>
+          <a:fillRef idx="3">
+            <a:schemeClr val="accent1"/>
+          </a:fillRef>
+          <a:effectRef idx="2">
+            <a:schemeClr val="accent1"/>
+          </a:effectRef>
+          <a:fontRef idx="minor">
+            <a:schemeClr val="lt1"/>
+          </a:fontRef>
+        </p:style>
+        <p:txBody>
+          <a:bodyPr rtlCol="0" anchor="ctr"/>
+          <a:lstStyle/>
+          <a:p>
+            <a:pPr algn="ctr"/>
+          </a:p>
+        </p:txBody>
+      </p:sp>
+      <p:sp>
+        <p:nvSpPr>
+          <p:cNvPr id="9" name="TextBox 8"/>
           <p:cNvSpPr txBox="1"/>
           <p:nvPr/>
         </p:nvSpPr>
         <p:spPr>
           <a:xfrm>
-            <a:off x="7790688" y="1527048"/>
-            <a:ext cx="3072384" cy="1645920"/>
+            <a:off x="1133856" y="2898648"/>
+            <a:ext cx="10049256" cy="1115568"/>
           </a:xfrm>
           <a:prstGeom prst="rect">
             <a:avLst/>
@@ -5243,11 +5042,11 @@
           <a:p>
             <a:pPr>
               <a:spcAft>
-                <a:spcPts val="200"/>
+                <a:spcPts val="100"/>
               </a:spcAft>
             </a:pPr>
             <a:r>
-              <a:rPr sz="1500" b="1">
+              <a:rPr sz="1600" b="1">
                 <a:solidFill>
                   <a:srgbClr val="1A365D"/>
                 </a:solidFill>
@@ -5263,43 +5062,59 @@
               </a:spcAft>
             </a:pPr>
             <a:r>
-              <a:rPr sz="1200" b="0">
-                <a:solidFill>
-                  <a:srgbClr val="6B7280"/>
-                </a:solidFill>
-                <a:latin typeface="Helvetica Neue"/>
-              </a:rPr>
-              <a:t>Refined mobile transformer design through better accuracy-latency trade-offs and scaling behavior.</a:t>
+              <a:rPr sz="1100" b="1">
+                <a:solidFill>
+                  <a:srgbClr val="2B6CB0"/>
+                </a:solidFill>
+                <a:latin typeface="Helvetica Neue"/>
+              </a:rPr>
+              <a:t>ICCV 2023  |  428 citations</a:t>
             </a:r>
           </a:p>
           <a:p>
             <a:pPr algn="l">
               <a:spcAft>
-                <a:spcPts val="0"/>
+                <a:spcPts val="300"/>
               </a:spcAft>
             </a:pPr>
             <a:r>
-              <a:rPr sz="1100" b="1">
-                <a:solidFill>
-                  <a:srgbClr val="2B6CB0"/>
-                </a:solidFill>
-                <a:latin typeface="Helvetica Neue"/>
-              </a:rPr>
-              <a:t>ICCV 2023  |  428 citations</a:t>
-            </a:r>
-          </a:p>
-        </p:txBody>
-      </p:sp>
-      <p:sp>
-        <p:nvSpPr>
-          <p:cNvPr id="11" name="Rounded Rectangle 10"/>
+              <a:rPr sz="1100" b="0">
+                <a:solidFill>
+                  <a:srgbClr val="6B7280"/>
+                </a:solidFill>
+                <a:latin typeface="Helvetica Neue"/>
+              </a:rPr>
+              <a:t>• Refined the mobile transformer design space with better architecture choices for latency, model size, and accuracy.</a:t>
+            </a:r>
+          </a:p>
+          <a:p>
+            <a:pPr algn="l">
+              <a:spcAft>
+                <a:spcPts val="300"/>
+              </a:spcAft>
+            </a:pPr>
+            <a:r>
+              <a:rPr sz="1100" b="0">
+                <a:solidFill>
+                  <a:srgbClr val="6B7280"/>
+                </a:solidFill>
+                <a:latin typeface="Helvetica Neue"/>
+              </a:rPr>
+              <a:t>• Strengthened the case for transformer backbones in real-time mobile vision by improving the efficiency-accuracy trade-off.</a:t>
+            </a:r>
+          </a:p>
+        </p:txBody>
+      </p:sp>
+      <p:sp>
+        <p:nvSpPr>
+          <p:cNvPr id="10" name="Rounded Rectangle 9"/>
           <p:cNvSpPr/>
           <p:nvPr/>
         </p:nvSpPr>
         <p:spPr>
           <a:xfrm>
-            <a:off x="3977639" y="3520440"/>
-            <a:ext cx="3383280" cy="1554480"/>
+            <a:off x="914400" y="4251960"/>
+            <a:ext cx="10378440" cy="1298448"/>
           </a:xfrm>
           <a:prstGeom prst="roundRect">
             <a:avLst/>
@@ -5337,14 +5152,57 @@
       </p:sp>
       <p:sp>
         <p:nvSpPr>
+          <p:cNvPr id="11" name="Rectangle 10"/>
+          <p:cNvSpPr/>
+          <p:nvPr/>
+        </p:nvSpPr>
+        <p:spPr>
+          <a:xfrm>
+            <a:off x="914400" y="4251960"/>
+            <a:ext cx="54864" cy="1298448"/>
+          </a:xfrm>
+          <a:prstGeom prst="rect">
+            <a:avLst/>
+          </a:prstGeom>
+          <a:solidFill>
+            <a:srgbClr val="2B6CB0"/>
+          </a:solidFill>
+          <a:ln>
+            <a:noFill/>
+          </a:ln>
+        </p:spPr>
+        <p:style>
+          <a:lnRef idx="1">
+            <a:schemeClr val="accent1"/>
+          </a:lnRef>
+          <a:fillRef idx="3">
+            <a:schemeClr val="accent1"/>
+          </a:fillRef>
+          <a:effectRef idx="2">
+            <a:schemeClr val="accent1"/>
+          </a:effectRef>
+          <a:fontRef idx="minor">
+            <a:schemeClr val="lt1"/>
+          </a:fontRef>
+        </p:style>
+        <p:txBody>
+          <a:bodyPr rtlCol="0" anchor="ctr"/>
+          <a:lstStyle/>
+          <a:p>
+            <a:pPr algn="ctr"/>
+          </a:p>
+        </p:txBody>
+      </p:sp>
+      <p:sp>
+        <p:nvSpPr>
           <p:cNvPr id="12" name="TextBox 11"/>
           <p:cNvSpPr txBox="1"/>
           <p:nvPr/>
         </p:nvSpPr>
         <p:spPr>
           <a:xfrm>
-            <a:off x="4178807" y="3630168"/>
-            <a:ext cx="3072384" cy="1371600"/>
+            <a:off x="1133856" y="4361688"/>
+            <a:ext cx="10049256" cy="1115568"/>
           </a:xfrm>
           <a:prstGeom prst="rect">
             <a:avLst/>
@@ -5359,17 +5217,17 @@
           <a:p>
             <a:pPr>
               <a:spcAft>
-                <a:spcPts val="200"/>
+                <a:spcPts val="100"/>
               </a:spcAft>
             </a:pPr>
             <a:r>
-              <a:rPr sz="1500" b="1">
+              <a:rPr sz="1600" b="1">
                 <a:solidFill>
                   <a:srgbClr val="1A365D"/>
                 </a:solidFill>
                 <a:latin typeface="Helvetica Neue"/>
               </a:rPr>
-              <a:t>Pruning-as-Search</a:t>
+              <a:t>Pruning-as-Search: Efficient Neural Architecture Search via Channel Pruning and Structural Reparameterization</a:t>
             </a:r>
           </a:p>
           <a:p>
@@ -5379,88 +5237,59 @@
               </a:spcAft>
             </a:pPr>
             <a:r>
-              <a:rPr sz="1200" b="0">
-                <a:solidFill>
-                  <a:srgbClr val="6B7280"/>
-                </a:solidFill>
-                <a:latin typeface="Helvetica Neue"/>
-              </a:rPr>
-              <a:t>Efficient neural architecture search via channel pruning and structural reparameterization.</a:t>
+              <a:rPr sz="1100" b="1">
+                <a:solidFill>
+                  <a:srgbClr val="2B6CB0"/>
+                </a:solidFill>
+                <a:latin typeface="Helvetica Neue"/>
+              </a:rPr>
+              <a:t>IJCAI 2022  |  78 citations</a:t>
             </a:r>
           </a:p>
           <a:p>
             <a:pPr algn="l">
               <a:spcAft>
-                <a:spcPts val="0"/>
+                <a:spcPts val="300"/>
               </a:spcAft>
             </a:pPr>
             <a:r>
-              <a:rPr sz="1100" b="1">
-                <a:solidFill>
-                  <a:srgbClr val="2B6CB0"/>
-                </a:solidFill>
-                <a:latin typeface="Helvetica Neue"/>
-              </a:rPr>
-              <a:t>IJCAI 2022  |  78 citations</a:t>
-            </a:r>
-          </a:p>
-        </p:txBody>
-      </p:sp>
-      <p:sp>
-        <p:nvSpPr>
-          <p:cNvPr id="13" name="Rounded Rectangle 12"/>
-          <p:cNvSpPr/>
-          <p:nvPr/>
-        </p:nvSpPr>
-        <p:spPr>
-          <a:xfrm>
-            <a:off x="7589520" y="3520440"/>
-            <a:ext cx="3383280" cy="1554480"/>
-          </a:xfrm>
-          <a:prstGeom prst="roundRect">
-            <a:avLst/>
-          </a:prstGeom>
-          <a:solidFill>
-            <a:srgbClr val="F4F7FB"/>
-          </a:solidFill>
-          <a:ln w="12700">
-            <a:solidFill>
-              <a:srgbClr val="F4F7FB"/>
-            </a:solidFill>
-          </a:ln>
-        </p:spPr>
-        <p:style>
-          <a:lnRef idx="1">
-            <a:schemeClr val="accent1"/>
-          </a:lnRef>
-          <a:fillRef idx="3">
-            <a:schemeClr val="accent1"/>
-          </a:fillRef>
-          <a:effectRef idx="2">
-            <a:schemeClr val="accent1"/>
-          </a:effectRef>
-          <a:fontRef idx="minor">
-            <a:schemeClr val="lt1"/>
-          </a:fontRef>
-        </p:style>
-        <p:txBody>
-          <a:bodyPr rtlCol="0" anchor="ctr"/>
-          <a:lstStyle/>
-          <a:p>
-            <a:pPr algn="ctr"/>
-          </a:p>
-        </p:txBody>
-      </p:sp>
-      <p:sp>
-        <p:nvSpPr>
-          <p:cNvPr id="14" name="TextBox 13"/>
+              <a:rPr sz="1100" b="0">
+                <a:solidFill>
+                  <a:srgbClr val="6B7280"/>
+                </a:solidFill>
+                <a:latin typeface="Helvetica Neue"/>
+              </a:rPr>
+              <a:t>• Reformulated efficient architecture search using channel pruning and structural reparameterization instead of expensive search loops.</a:t>
+            </a:r>
+          </a:p>
+          <a:p>
+            <a:pPr algn="l">
+              <a:spcAft>
+                <a:spcPts val="300"/>
+              </a:spcAft>
+            </a:pPr>
+            <a:r>
+              <a:rPr sz="1100" b="0">
+                <a:solidFill>
+                  <a:srgbClr val="6B7280"/>
+                </a:solidFill>
+                <a:latin typeface="Helvetica Neue"/>
+              </a:rPr>
+              <a:t>• Connected efficient model design with deployment-oriented architectures and reduced the cost of searching for compact models.</a:t>
+            </a:r>
+          </a:p>
+        </p:txBody>
+      </p:sp>
+      <p:sp>
+        <p:nvSpPr>
+          <p:cNvPr id="13" name="TextBox 12"/>
           <p:cNvSpPr txBox="1"/>
           <p:nvPr/>
         </p:nvSpPr>
         <p:spPr>
           <a:xfrm>
-            <a:off x="7790688" y="3630168"/>
-            <a:ext cx="3072384" cy="1371600"/>
+            <a:off x="914400" y="5715000"/>
+            <a:ext cx="10241280" cy="457200"/>
           </a:xfrm>
           <a:prstGeom prst="rect">
             <a:avLst/>
@@ -5468,56 +5297,19 @@
           <a:noFill/>
         </p:spPr>
         <p:txBody>
-          <a:bodyPr wrap="square">
+          <a:bodyPr wrap="none">
             <a:spAutoFit/>
           </a:bodyPr>
           <a:lstStyle/>
           <a:p>
-            <a:pPr>
-              <a:spcAft>
-                <a:spcPts val="200"/>
-              </a:spcAft>
-            </a:pPr>
-            <a:r>
-              <a:rPr sz="1500" b="1">
-                <a:solidFill>
-                  <a:srgbClr val="1A365D"/>
-                </a:solidFill>
-                <a:latin typeface="Helvetica Neue"/>
-              </a:rPr>
-              <a:t>Towards Real-Time Segmentation on the Edge</a:t>
-            </a:r>
-          </a:p>
-          <a:p>
-            <a:pPr algn="l">
-              <a:spcAft>
-                <a:spcPts val="600"/>
-              </a:spcAft>
-            </a:pPr>
-            <a:r>
-              <a:rPr sz="1200" b="0">
+            <a:r>
+              <a:rPr sz="1100" b="0">
                 <a:solidFill>
                   <a:srgbClr val="6B7280"/>
                 </a:solidFill>
                 <a:latin typeface="Helvetica Neue"/>
               </a:rPr>
-              <a:t>Real-time segmentation methods designed for edge deployment scenarios.</a:t>
-            </a:r>
-          </a:p>
-          <a:p>
-            <a:pPr algn="l">
-              <a:spcAft>
-                <a:spcPts val="0"/>
-              </a:spcAft>
-            </a:pPr>
-            <a:r>
-              <a:rPr sz="1100" b="1">
-                <a:solidFill>
-                  <a:srgbClr val="2B6CB0"/>
-                </a:solidFill>
-                <a:latin typeface="Helvetica Neue"/>
-              </a:rPr>
-              <a:t>AAAI 2023  |  25 citations</a:t>
+              <a:t>Related work: Towards Real-Time Segmentation on the Edge (AAAI 2023) extends efficient design ideas to dense prediction on edge devices.</a:t>
             </a:r>
           </a:p>
         </p:txBody>
@@ -5556,14 +5348,14 @@
         </p:nvSpPr>
         <p:spPr>
           <a:xfrm>
-            <a:off x="731520" y="502920"/>
-            <a:ext cx="73152" cy="438912"/>
+            <a:off x="731520" y="512064"/>
+            <a:ext cx="73152" cy="457200"/>
           </a:xfrm>
           <a:prstGeom prst="rect">
             <a:avLst/>
           </a:prstGeom>
           <a:solidFill>
-            <a:srgbClr val="2B6CB0"/>
+            <a:srgbClr val="2F8559"/>
           </a:solidFill>
           <a:ln>
             <a:noFill/>
@@ -5600,7 +5392,7 @@
         <p:spPr>
           <a:xfrm>
             <a:off x="987552" y="384048"/>
-            <a:ext cx="10241280" cy="594360"/>
+            <a:ext cx="10241280" cy="640080"/>
           </a:xfrm>
           <a:prstGeom prst="rect">
             <a:avLst/>
@@ -5620,7 +5412,7 @@
                 </a:solidFill>
                 <a:latin typeface="Helvetica Neue"/>
               </a:rPr>
-              <a:t>Selected Contributions: Diffusion Models and Generative AI</a:t>
+              <a:t>Direction 2: Diffusion Models and Generative AI</a:t>
             </a:r>
           </a:p>
           <a:p>
@@ -5630,13 +5422,13 @@
               </a:spcAft>
             </a:pPr>
             <a:r>
-              <a:rPr sz="1500" b="0">
+              <a:rPr sz="1400" b="0">
                 <a:solidFill>
                   <a:srgbClr val="6B7280"/>
                 </a:solidFill>
                 <a:latin typeface="Helvetica Neue"/>
               </a:rPr>
-              <a:t>Efficient text-to-image and video generation with an emphasis on mobile deployment and quality.</a:t>
+              <a:t>Recent and highly visible work on efficient generative modeling for mobile and edge deployment.</a:t>
             </a:r>
           </a:p>
         </p:txBody>
@@ -5650,7 +5442,7 @@
         <p:spPr>
           <a:xfrm>
             <a:off x="914400" y="1325880"/>
-            <a:ext cx="3520440" cy="1554480"/>
+            <a:ext cx="10378440" cy="1298448"/>
           </a:xfrm>
           <a:prstGeom prst="roundRect">
             <a:avLst/>
@@ -5688,14 +5480,57 @@
       </p:sp>
       <p:sp>
         <p:nvSpPr>
-          <p:cNvPr id="5" name="TextBox 4"/>
+          <p:cNvPr id="5" name="Rectangle 4"/>
+          <p:cNvSpPr/>
+          <p:nvPr/>
+        </p:nvSpPr>
+        <p:spPr>
+          <a:xfrm>
+            <a:off x="914400" y="1325880"/>
+            <a:ext cx="54864" cy="1298448"/>
+          </a:xfrm>
+          <a:prstGeom prst="rect">
+            <a:avLst/>
+          </a:prstGeom>
+          <a:solidFill>
+            <a:srgbClr val="2F8559"/>
+          </a:solidFill>
+          <a:ln>
+            <a:noFill/>
+          </a:ln>
+        </p:spPr>
+        <p:style>
+          <a:lnRef idx="1">
+            <a:schemeClr val="accent1"/>
+          </a:lnRef>
+          <a:fillRef idx="3">
+            <a:schemeClr val="accent1"/>
+          </a:fillRef>
+          <a:effectRef idx="2">
+            <a:schemeClr val="accent1"/>
+          </a:effectRef>
+          <a:fontRef idx="minor">
+            <a:schemeClr val="lt1"/>
+          </a:fontRef>
+        </p:style>
+        <p:txBody>
+          <a:bodyPr rtlCol="0" anchor="ctr"/>
+          <a:lstStyle/>
+          <a:p>
+            <a:pPr algn="ctr"/>
+          </a:p>
+        </p:txBody>
+      </p:sp>
+      <p:sp>
+        <p:nvSpPr>
+          <p:cNvPr id="6" name="TextBox 5"/>
           <p:cNvSpPr txBox="1"/>
           <p:nvPr/>
         </p:nvSpPr>
         <p:spPr>
           <a:xfrm>
-            <a:off x="1115568" y="1435608"/>
-            <a:ext cx="3209544" cy="1371600"/>
+            <a:off x="1133856" y="1435608"/>
+            <a:ext cx="10049256" cy="1115568"/>
           </a:xfrm>
           <a:prstGeom prst="rect">
             <a:avLst/>
@@ -5710,17 +5545,17 @@
           <a:p>
             <a:pPr>
               <a:spcAft>
-                <a:spcPts val="200"/>
+                <a:spcPts val="100"/>
               </a:spcAft>
             </a:pPr>
             <a:r>
-              <a:rPr sz="1500" b="1">
+              <a:rPr sz="1600" b="1">
                 <a:solidFill>
                   <a:srgbClr val="1A365D"/>
                 </a:solidFill>
                 <a:latin typeface="Helvetica Neue"/>
               </a:rPr>
-              <a:t>SnapFusion</a:t>
+              <a:t>SnapFusion: Text-to-Image Diffusion Model on Mobile Devices within Two Seconds</a:t>
             </a:r>
           </a:p>
           <a:p>
@@ -5730,43 +5565,59 @@
               </a:spcAft>
             </a:pPr>
             <a:r>
-              <a:rPr sz="1200" b="0">
-                <a:solidFill>
-                  <a:srgbClr val="6B7280"/>
-                </a:solidFill>
-                <a:latin typeface="Helvetica Neue"/>
-              </a:rPr>
-              <a:t>Sub-two-second text-to-image diffusion on mobile devices through architecture and sampling optimization.</a:t>
+              <a:rPr sz="1100" b="1">
+                <a:solidFill>
+                  <a:srgbClr val="2F8559"/>
+                </a:solidFill>
+                <a:latin typeface="Helvetica Neue"/>
+              </a:rPr>
+              <a:t>NeurIPS 2023  |  305 citations</a:t>
             </a:r>
           </a:p>
           <a:p>
             <a:pPr algn="l">
               <a:spcAft>
-                <a:spcPts val="0"/>
+                <a:spcPts val="300"/>
               </a:spcAft>
             </a:pPr>
             <a:r>
-              <a:rPr sz="1100" b="1">
-                <a:solidFill>
-                  <a:srgbClr val="2F8559"/>
-                </a:solidFill>
-                <a:latin typeface="Helvetica Neue"/>
-              </a:rPr>
-              <a:t>NeurIPS 2023  |  305 citations</a:t>
-            </a:r>
-          </a:p>
-        </p:txBody>
-      </p:sp>
-      <p:sp>
-        <p:nvSpPr>
-          <p:cNvPr id="6" name="Rounded Rectangle 5"/>
+              <a:rPr sz="1100" b="0">
+                <a:solidFill>
+                  <a:srgbClr val="6B7280"/>
+                </a:solidFill>
+                <a:latin typeface="Helvetica Neue"/>
+              </a:rPr>
+              <a:t>• Redesigned the text-to-image diffusion pipeline for on-device generation through efficient architecture and faster inference.</a:t>
+            </a:r>
+          </a:p>
+          <a:p>
+            <a:pPr algn="l">
+              <a:spcAft>
+                <a:spcPts val="300"/>
+              </a:spcAft>
+            </a:pPr>
+            <a:r>
+              <a:rPr sz="1100" b="0">
+                <a:solidFill>
+                  <a:srgbClr val="6B7280"/>
+                </a:solidFill>
+                <a:latin typeface="Helvetica Neue"/>
+              </a:rPr>
+              <a:t>• Demonstrated that high-quality text-to-image diffusion can run in under two seconds on mobile hardware.</a:t>
+            </a:r>
+          </a:p>
+        </p:txBody>
+      </p:sp>
+      <p:sp>
+        <p:nvSpPr>
+          <p:cNvPr id="7" name="Rounded Rectangle 6"/>
           <p:cNvSpPr/>
           <p:nvPr/>
         </p:nvSpPr>
         <p:spPr>
           <a:xfrm>
-            <a:off x="4572000" y="1325880"/>
-            <a:ext cx="3520440" cy="1554480"/>
+            <a:off x="914400" y="2788920"/>
+            <a:ext cx="10378440" cy="1298448"/>
           </a:xfrm>
           <a:prstGeom prst="roundRect">
             <a:avLst/>
@@ -5804,14 +5655,57 @@
       </p:sp>
       <p:sp>
         <p:nvSpPr>
-          <p:cNvPr id="7" name="TextBox 6"/>
+          <p:cNvPr id="8" name="Rectangle 7"/>
+          <p:cNvSpPr/>
+          <p:nvPr/>
+        </p:nvSpPr>
+        <p:spPr>
+          <a:xfrm>
+            <a:off x="914400" y="2788920"/>
+            <a:ext cx="54864" cy="1298448"/>
+          </a:xfrm>
+          <a:prstGeom prst="rect">
+            <a:avLst/>
+          </a:prstGeom>
+          <a:solidFill>
+            <a:srgbClr val="2F8559"/>
+          </a:solidFill>
+          <a:ln>
+            <a:noFill/>
+          </a:ln>
+        </p:spPr>
+        <p:style>
+          <a:lnRef idx="1">
+            <a:schemeClr val="accent1"/>
+          </a:lnRef>
+          <a:fillRef idx="3">
+            <a:schemeClr val="accent1"/>
+          </a:fillRef>
+          <a:effectRef idx="2">
+            <a:schemeClr val="accent1"/>
+          </a:effectRef>
+          <a:fontRef idx="minor">
+            <a:schemeClr val="lt1"/>
+          </a:fontRef>
+        </p:style>
+        <p:txBody>
+          <a:bodyPr rtlCol="0" anchor="ctr"/>
+          <a:lstStyle/>
+          <a:p>
+            <a:pPr algn="ctr"/>
+          </a:p>
+        </p:txBody>
+      </p:sp>
+      <p:sp>
+        <p:nvSpPr>
+          <p:cNvPr id="9" name="TextBox 8"/>
           <p:cNvSpPr txBox="1"/>
           <p:nvPr/>
         </p:nvSpPr>
         <p:spPr>
           <a:xfrm>
-            <a:off x="4773168" y="1435608"/>
-            <a:ext cx="3209544" cy="1371600"/>
+            <a:off x="1133856" y="2898648"/>
+            <a:ext cx="10049256" cy="1115568"/>
           </a:xfrm>
           <a:prstGeom prst="rect">
             <a:avLst/>
@@ -5826,17 +5720,17 @@
           <a:p>
             <a:pPr>
               <a:spcAft>
-                <a:spcPts val="200"/>
+                <a:spcPts val="100"/>
               </a:spcAft>
             </a:pPr>
             <a:r>
-              <a:rPr sz="1500" b="1">
+              <a:rPr sz="1600" b="1">
                 <a:solidFill>
                   <a:srgbClr val="1A365D"/>
                 </a:solidFill>
                 <a:latin typeface="Helvetica Neue"/>
               </a:rPr>
-              <a:t>TextCraftor</a:t>
+              <a:t>TextCraftor: Your Text Encoder Can Be Image Quality Controller</a:t>
             </a:r>
           </a:p>
           <a:p>
@@ -5846,43 +5740,59 @@
               </a:spcAft>
             </a:pPr>
             <a:r>
-              <a:rPr sz="1200" b="0">
-                <a:solidFill>
-                  <a:srgbClr val="6B7280"/>
-                </a:solidFill>
-                <a:latin typeface="Helvetica Neue"/>
-              </a:rPr>
-              <a:t>Used the text encoder as a controllable quality signal for diffusion image generation.</a:t>
+              <a:rPr sz="1100" b="1">
+                <a:solidFill>
+                  <a:srgbClr val="2F8559"/>
+                </a:solidFill>
+                <a:latin typeface="Helvetica Neue"/>
+              </a:rPr>
+              <a:t>CVPR 2024  |  32 citations</a:t>
             </a:r>
           </a:p>
           <a:p>
             <a:pPr algn="l">
               <a:spcAft>
-                <a:spcPts val="0"/>
+                <a:spcPts val="300"/>
               </a:spcAft>
             </a:pPr>
             <a:r>
-              <a:rPr sz="1100" b="1">
-                <a:solidFill>
-                  <a:srgbClr val="2F8559"/>
-                </a:solidFill>
-                <a:latin typeface="Helvetica Neue"/>
-              </a:rPr>
-              <a:t>CVPR 2024  |  32 citations</a:t>
-            </a:r>
-          </a:p>
-        </p:txBody>
-      </p:sp>
-      <p:sp>
-        <p:nvSpPr>
-          <p:cNvPr id="8" name="Rounded Rectangle 7"/>
+              <a:rPr sz="1100" b="0">
+                <a:solidFill>
+                  <a:srgbClr val="6B7280"/>
+                </a:solidFill>
+                <a:latin typeface="Helvetica Neue"/>
+              </a:rPr>
+              <a:t>• Showed that the text encoder can act as an explicit control knob for image quality and text-image alignment.</a:t>
+            </a:r>
+          </a:p>
+          <a:p>
+            <a:pPr algn="l">
+              <a:spcAft>
+                <a:spcPts val="300"/>
+              </a:spcAft>
+            </a:pPr>
+            <a:r>
+              <a:rPr sz="1100" b="0">
+                <a:solidFill>
+                  <a:srgbClr val="6B7280"/>
+                </a:solidFill>
+                <a:latin typeface="Helvetica Neue"/>
+              </a:rPr>
+              <a:t>• Improved generation quality without relying only on larger backbones or slower sampling procedures.</a:t>
+            </a:r>
+          </a:p>
+        </p:txBody>
+      </p:sp>
+      <p:sp>
+        <p:nvSpPr>
+          <p:cNvPr id="10" name="Rounded Rectangle 9"/>
           <p:cNvSpPr/>
           <p:nvPr/>
         </p:nvSpPr>
         <p:spPr>
           <a:xfrm>
-            <a:off x="8229600" y="1325880"/>
-            <a:ext cx="3063240" cy="1554480"/>
+            <a:off x="914400" y="4251960"/>
+            <a:ext cx="10378440" cy="1298448"/>
           </a:xfrm>
           <a:prstGeom prst="roundRect">
             <a:avLst/>
@@ -5920,362 +5830,14 @@
       </p:sp>
       <p:sp>
         <p:nvSpPr>
-          <p:cNvPr id="9" name="TextBox 8"/>
-          <p:cNvSpPr txBox="1"/>
-          <p:nvPr/>
-        </p:nvSpPr>
-        <p:spPr>
-          <a:xfrm>
-            <a:off x="8430768" y="1435608"/>
-            <a:ext cx="2752344" cy="1371600"/>
-          </a:xfrm>
-          <a:prstGeom prst="rect">
-            <a:avLst/>
-          </a:prstGeom>
-          <a:noFill/>
-        </p:spPr>
-        <p:txBody>
-          <a:bodyPr wrap="square">
-            <a:spAutoFit/>
-          </a:bodyPr>
-          <a:lstStyle/>
-          <a:p>
-            <a:pPr>
-              <a:spcAft>
-                <a:spcPts val="200"/>
-              </a:spcAft>
-            </a:pPr>
-            <a:r>
-              <a:rPr sz="1500" b="1">
-                <a:solidFill>
-                  <a:srgbClr val="1A365D"/>
-                </a:solidFill>
-                <a:latin typeface="Helvetica Neue"/>
-              </a:rPr>
-              <a:t>BitsFusion</a:t>
-            </a:r>
-          </a:p>
-          <a:p>
-            <a:pPr algn="l">
-              <a:spcAft>
-                <a:spcPts val="600"/>
-              </a:spcAft>
-            </a:pPr>
-            <a:r>
-              <a:rPr sz="1200" b="0">
-                <a:solidFill>
-                  <a:srgbClr val="6B7280"/>
-                </a:solidFill>
-                <a:latin typeface="Helvetica Neue"/>
-              </a:rPr>
-              <a:t>1.99-bit diffusion model quantization with limited generation quality degradation.</a:t>
-            </a:r>
-          </a:p>
-          <a:p>
-            <a:pPr algn="l">
-              <a:spcAft>
-                <a:spcPts val="0"/>
-              </a:spcAft>
-            </a:pPr>
-            <a:r>
-              <a:rPr sz="1100" b="1">
-                <a:solidFill>
-                  <a:srgbClr val="2F8559"/>
-                </a:solidFill>
-                <a:latin typeface="Helvetica Neue"/>
-              </a:rPr>
-              <a:t>NeurIPS 2024  |  43 citations</a:t>
-            </a:r>
-          </a:p>
-        </p:txBody>
-      </p:sp>
-      <p:sp>
-        <p:nvSpPr>
-          <p:cNvPr id="10" name="Rounded Rectangle 9"/>
+          <p:cNvPr id="11" name="Rectangle 10"/>
           <p:cNvSpPr/>
           <p:nvPr/>
         </p:nvSpPr>
         <p:spPr>
           <a:xfrm>
-            <a:off x="914400" y="3154680"/>
-            <a:ext cx="3520440" cy="1554480"/>
-          </a:xfrm>
-          <a:prstGeom prst="roundRect">
-            <a:avLst/>
-          </a:prstGeom>
-          <a:solidFill>
-            <a:srgbClr val="F4F7FB"/>
-          </a:solidFill>
-          <a:ln w="12700">
-            <a:solidFill>
-              <a:srgbClr val="F4F7FB"/>
-            </a:solidFill>
-          </a:ln>
-        </p:spPr>
-        <p:style>
-          <a:lnRef idx="1">
-            <a:schemeClr val="accent1"/>
-          </a:lnRef>
-          <a:fillRef idx="3">
-            <a:schemeClr val="accent1"/>
-          </a:fillRef>
-          <a:effectRef idx="2">
-            <a:schemeClr val="accent1"/>
-          </a:effectRef>
-          <a:fontRef idx="minor">
-            <a:schemeClr val="lt1"/>
-          </a:fontRef>
-        </p:style>
-        <p:txBody>
-          <a:bodyPr rtlCol="0" anchor="ctr"/>
-          <a:lstStyle/>
-          <a:p>
-            <a:pPr algn="ctr"/>
-          </a:p>
-        </p:txBody>
-      </p:sp>
-      <p:sp>
-        <p:nvSpPr>
-          <p:cNvPr id="11" name="TextBox 10"/>
-          <p:cNvSpPr txBox="1"/>
-          <p:nvPr/>
-        </p:nvSpPr>
-        <p:spPr>
-          <a:xfrm>
-            <a:off x="1115568" y="3264408"/>
-            <a:ext cx="3209544" cy="1371600"/>
-          </a:xfrm>
-          <a:prstGeom prst="rect">
-            <a:avLst/>
-          </a:prstGeom>
-          <a:noFill/>
-        </p:spPr>
-        <p:txBody>
-          <a:bodyPr wrap="square">
-            <a:spAutoFit/>
-          </a:bodyPr>
-          <a:lstStyle/>
-          <a:p>
-            <a:pPr>
-              <a:spcAft>
-                <a:spcPts val="200"/>
-              </a:spcAft>
-            </a:pPr>
-            <a:r>
-              <a:rPr sz="1500" b="1">
-                <a:solidFill>
-                  <a:srgbClr val="1A365D"/>
-                </a:solidFill>
-                <a:latin typeface="Helvetica Neue"/>
-              </a:rPr>
-              <a:t>SF-V</a:t>
-            </a:r>
-          </a:p>
-          <a:p>
-            <a:pPr algn="l">
-              <a:spcAft>
-                <a:spcPts val="600"/>
-              </a:spcAft>
-            </a:pPr>
-            <a:r>
-              <a:rPr sz="1200" b="0">
-                <a:solidFill>
-                  <a:srgbClr val="6B7280"/>
-                </a:solidFill>
-                <a:latin typeface="Helvetica Neue"/>
-              </a:rPr>
-              <a:t>Single-forward video generation to reduce computational cost while maintaining quality.</a:t>
-            </a:r>
-          </a:p>
-          <a:p>
-            <a:pPr algn="l">
-              <a:spcAft>
-                <a:spcPts val="0"/>
-              </a:spcAft>
-            </a:pPr>
-            <a:r>
-              <a:rPr sz="1100" b="1">
-                <a:solidFill>
-                  <a:srgbClr val="2F8559"/>
-                </a:solidFill>
-                <a:latin typeface="Helvetica Neue"/>
-              </a:rPr>
-              <a:t>NeurIPS 2024  |  31 citations</a:t>
-            </a:r>
-          </a:p>
-        </p:txBody>
-      </p:sp>
-      <p:sp>
-        <p:nvSpPr>
-          <p:cNvPr id="12" name="Rounded Rectangle 11"/>
-          <p:cNvSpPr/>
-          <p:nvPr/>
-        </p:nvSpPr>
-        <p:spPr>
-          <a:xfrm>
-            <a:off x="4572000" y="3154680"/>
-            <a:ext cx="3520440" cy="1554480"/>
-          </a:xfrm>
-          <a:prstGeom prst="roundRect">
-            <a:avLst/>
-          </a:prstGeom>
-          <a:solidFill>
-            <a:srgbClr val="F4F7FB"/>
-          </a:solidFill>
-          <a:ln w="12700">
-            <a:solidFill>
-              <a:srgbClr val="F4F7FB"/>
-            </a:solidFill>
-          </a:ln>
-        </p:spPr>
-        <p:style>
-          <a:lnRef idx="1">
-            <a:schemeClr val="accent1"/>
-          </a:lnRef>
-          <a:fillRef idx="3">
-            <a:schemeClr val="accent1"/>
-          </a:fillRef>
-          <a:effectRef idx="2">
-            <a:schemeClr val="accent1"/>
-          </a:effectRef>
-          <a:fontRef idx="minor">
-            <a:schemeClr val="lt1"/>
-          </a:fontRef>
-        </p:style>
-        <p:txBody>
-          <a:bodyPr rtlCol="0" anchor="ctr"/>
-          <a:lstStyle/>
-          <a:p>
-            <a:pPr algn="ctr"/>
-          </a:p>
-        </p:txBody>
-      </p:sp>
-      <p:sp>
-        <p:nvSpPr>
-          <p:cNvPr id="13" name="TextBox 12"/>
-          <p:cNvSpPr txBox="1"/>
-          <p:nvPr/>
-        </p:nvSpPr>
-        <p:spPr>
-          <a:xfrm>
-            <a:off x="4773168" y="3264408"/>
-            <a:ext cx="3209544" cy="1371600"/>
-          </a:xfrm>
-          <a:prstGeom prst="rect">
-            <a:avLst/>
-          </a:prstGeom>
-          <a:noFill/>
-        </p:spPr>
-        <p:txBody>
-          <a:bodyPr wrap="square">
-            <a:spAutoFit/>
-          </a:bodyPr>
-          <a:lstStyle/>
-          <a:p>
-            <a:pPr>
-              <a:spcAft>
-                <a:spcPts val="200"/>
-              </a:spcAft>
-            </a:pPr>
-            <a:r>
-              <a:rPr sz="1500" b="1">
-                <a:solidFill>
-                  <a:srgbClr val="1A365D"/>
-                </a:solidFill>
-                <a:latin typeface="Helvetica Neue"/>
-              </a:rPr>
-              <a:t>LazyDiT</a:t>
-            </a:r>
-          </a:p>
-          <a:p>
-            <a:pPr algn="l">
-              <a:spcAft>
-                <a:spcPts val="600"/>
-              </a:spcAft>
-            </a:pPr>
-            <a:r>
-              <a:rPr sz="1200" b="0">
-                <a:solidFill>
-                  <a:srgbClr val="6B7280"/>
-                </a:solidFill>
-                <a:latin typeface="Helvetica Neue"/>
-              </a:rPr>
-              <a:t>Accelerated diffusion transformers through lazy learning and reduced redundant computation.</a:t>
-            </a:r>
-          </a:p>
-          <a:p>
-            <a:pPr algn="l">
-              <a:spcAft>
-                <a:spcPts val="0"/>
-              </a:spcAft>
-            </a:pPr>
-            <a:r>
-              <a:rPr sz="1100" b="1">
-                <a:solidFill>
-                  <a:srgbClr val="2F8559"/>
-                </a:solidFill>
-                <a:latin typeface="Helvetica Neue"/>
-              </a:rPr>
-              <a:t>AAAI 2025  |  49 citations</a:t>
-            </a:r>
-          </a:p>
-        </p:txBody>
-      </p:sp>
-      <p:sp>
-        <p:nvSpPr>
-          <p:cNvPr id="14" name="Rounded Rectangle 13"/>
-          <p:cNvSpPr/>
-          <p:nvPr/>
-        </p:nvSpPr>
-        <p:spPr>
-          <a:xfrm>
-            <a:off x="8229600" y="3063240"/>
-            <a:ext cx="3063240" cy="1920240"/>
-          </a:xfrm>
-          <a:prstGeom prst="roundRect">
-            <a:avLst/>
-          </a:prstGeom>
-          <a:solidFill>
-            <a:srgbClr val="FAFBFD"/>
-          </a:solidFill>
-          <a:ln w="12700">
-            <a:solidFill>
-              <a:srgbClr val="E2E8F0"/>
-            </a:solidFill>
-          </a:ln>
-        </p:spPr>
-        <p:style>
-          <a:lnRef idx="1">
-            <a:schemeClr val="accent1"/>
-          </a:lnRef>
-          <a:fillRef idx="3">
-            <a:schemeClr val="accent1"/>
-          </a:fillRef>
-          <a:effectRef idx="2">
-            <a:schemeClr val="accent1"/>
-          </a:effectRef>
-          <a:fontRef idx="minor">
-            <a:schemeClr val="lt1"/>
-          </a:fontRef>
-        </p:style>
-        <p:txBody>
-          <a:bodyPr rtlCol="0" anchor="ctr"/>
-          <a:lstStyle/>
-          <a:p>
-            <a:pPr algn="ctr"/>
-          </a:p>
-        </p:txBody>
-      </p:sp>
-      <p:sp>
-        <p:nvSpPr>
-          <p:cNvPr id="15" name="Rectangle 14"/>
-          <p:cNvSpPr/>
-          <p:nvPr/>
-        </p:nvSpPr>
-        <p:spPr>
-          <a:xfrm>
-            <a:off x="8229600" y="3063240"/>
-            <a:ext cx="54864" cy="1920240"/>
+            <a:off x="914400" y="4251960"/>
+            <a:ext cx="54864" cy="1298448"/>
           </a:xfrm>
           <a:prstGeom prst="rect">
             <a:avLst/>
@@ -6311,14 +5873,14 @@
       </p:sp>
       <p:sp>
         <p:nvSpPr>
-          <p:cNvPr id="16" name="TextBox 15"/>
+          <p:cNvPr id="12" name="TextBox 11"/>
           <p:cNvSpPr txBox="1"/>
           <p:nvPr/>
         </p:nvSpPr>
         <p:spPr>
           <a:xfrm>
-            <a:off x="8449056" y="3227832"/>
-            <a:ext cx="2743200" cy="1664208"/>
+            <a:off x="1133856" y="4361688"/>
+            <a:ext cx="10049256" cy="1115568"/>
           </a:xfrm>
           <a:prstGeom prst="rect">
             <a:avLst/>
@@ -6333,65 +5895,99 @@
           <a:p>
             <a:pPr>
               <a:spcAft>
-                <a:spcPts val="800"/>
+                <a:spcPts val="100"/>
               </a:spcAft>
             </a:pPr>
             <a:r>
-              <a:rPr sz="1900" b="1">
+              <a:rPr sz="1600" b="1">
                 <a:solidFill>
                   <a:srgbClr val="1A365D"/>
                 </a:solidFill>
                 <a:latin typeface="Helvetica Neue"/>
               </a:rPr>
-              <a:t>Broader Generative AI Theme</a:t>
+              <a:t>BitsFusion: 1.99 Bits Weight Quantization of Diffusion Model</a:t>
             </a:r>
           </a:p>
           <a:p>
             <a:pPr algn="l">
               <a:spcAft>
-                <a:spcPts val="500"/>
+                <a:spcPts val="600"/>
               </a:spcAft>
             </a:pPr>
             <a:r>
-              <a:rPr sz="1300" b="0">
-                <a:solidFill>
-                  <a:srgbClr val="6B7280"/>
-                </a:solidFill>
-                <a:latin typeface="Helvetica Neue"/>
-              </a:rPr>
-              <a:t>• High-resolution mobile generation (SnapGen, CVPR 2025).</a:t>
+              <a:rPr sz="1100" b="1">
+                <a:solidFill>
+                  <a:srgbClr val="2F8559"/>
+                </a:solidFill>
+                <a:latin typeface="Helvetica Neue"/>
+              </a:rPr>
+              <a:t>NeurIPS 2024  |  43 citations</a:t>
             </a:r>
           </a:p>
           <a:p>
             <a:pPr algn="l">
               <a:spcAft>
-                <a:spcPts val="500"/>
+                <a:spcPts val="300"/>
               </a:spcAft>
             </a:pPr>
             <a:r>
-              <a:rPr sz="1300" b="0">
+              <a:rPr sz="1100" b="0">
                 <a:solidFill>
                   <a:srgbClr val="6B7280"/>
                 </a:solidFill>
                 <a:latin typeface="Helvetica Neue"/>
               </a:rPr>
-              <a:t>• Mobile video generation (SnapGen-V, CVPR 2025).</a:t>
+              <a:t>• Introduced ultra-low-bit weight quantization for diffusion models at 1.99 bits with compression-aware optimization.</a:t>
             </a:r>
           </a:p>
           <a:p>
             <a:pPr algn="l">
               <a:spcAft>
-                <a:spcPts val="500"/>
+                <a:spcPts val="300"/>
               </a:spcAft>
             </a:pPr>
             <a:r>
-              <a:rPr sz="1300" b="0">
+              <a:rPr sz="1100" b="0">
                 <a:solidFill>
                   <a:srgbClr val="6B7280"/>
                 </a:solidFill>
                 <a:latin typeface="Helvetica Neue"/>
               </a:rPr>
-              <a:t>• Recent work also spans efficient autoencoders and diffusion acceleration.</a:t>
+              <a:t>• Pushed diffusion efficiency to an aggressive low-precision regime while maintaining useful generation quality.</a:t>
+            </a:r>
+          </a:p>
+        </p:txBody>
+      </p:sp>
+      <p:sp>
+        <p:nvSpPr>
+          <p:cNvPr id="13" name="TextBox 12"/>
+          <p:cNvSpPr txBox="1"/>
+          <p:nvPr/>
+        </p:nvSpPr>
+        <p:spPr>
+          <a:xfrm>
+            <a:off x="914400" y="5715000"/>
+            <a:ext cx="10241280" cy="457200"/>
+          </a:xfrm>
+          <a:prstGeom prst="rect">
+            <a:avLst/>
+          </a:prstGeom>
+          <a:noFill/>
+        </p:spPr>
+        <p:txBody>
+          <a:bodyPr wrap="none">
+            <a:spAutoFit/>
+          </a:bodyPr>
+          <a:lstStyle/>
+          <a:p>
+            <a:r>
+              <a:rPr sz="1100" b="0">
+                <a:solidFill>
+                  <a:srgbClr val="6B7280"/>
+                </a:solidFill>
+                <a:latin typeface="Helvetica Neue"/>
+              </a:rPr>
+              <a:t>Other recent work: LazyDiT (AAAI 2025), SF-V (NeurIPS 2024), SnapGen / SnapGen-V (CVPR 2025), and Improving the Diffusability of Autoencoders (2025).</a:t>
             </a:r>
           </a:p>
         </p:txBody>
@@ -6430,14 +6026,14 @@
         </p:nvSpPr>
         <p:spPr>
           <a:xfrm>
-            <a:off x="731520" y="502920"/>
-            <a:ext cx="73152" cy="438912"/>
+            <a:off x="731520" y="512064"/>
+            <a:ext cx="73152" cy="457200"/>
           </a:xfrm>
           <a:prstGeom prst="rect">
             <a:avLst/>
           </a:prstGeom>
           <a:solidFill>
-            <a:srgbClr val="2B6CB0"/>
+            <a:srgbClr val="734AB8"/>
           </a:solidFill>
           <a:ln>
             <a:noFill/>
@@ -6474,7 +6070,7 @@
         <p:spPr>
           <a:xfrm>
             <a:off x="987552" y="384048"/>
-            <a:ext cx="10241280" cy="594360"/>
+            <a:ext cx="10241280" cy="640080"/>
           </a:xfrm>
           <a:prstGeom prst="rect">
             <a:avLst/>
@@ -6494,7 +6090,7 @@
                 </a:solidFill>
                 <a:latin typeface="Helvetica Neue"/>
               </a:rPr>
-              <a:t>Selected Contributions: Compression and Hardware-Aware Optimization</a:t>
+              <a:t>Direction 3: Compression and Hardware-Aware Optimization</a:t>
             </a:r>
           </a:p>
           <a:p>
@@ -6504,13 +6100,13 @@
               </a:spcAft>
             </a:pPr>
             <a:r>
-              <a:rPr sz="1500" b="0">
+              <a:rPr sz="1400" b="0">
                 <a:solidFill>
                   <a:srgbClr val="6B7280"/>
                 </a:solidFill>
                 <a:latin typeface="Helvetica Neue"/>
               </a:rPr>
-              <a:t>Quantization, sparse training, and FPGA-aware acceleration for efficient AI systems.</a:t>
+              <a:t>Most cited systems work on quantization, sparse training, and FPGA-aware acceleration.</a:t>
             </a:r>
           </a:p>
         </p:txBody>
@@ -6524,7 +6120,7 @@
         <p:spPr>
           <a:xfrm>
             <a:off x="914400" y="1325880"/>
-            <a:ext cx="3520440" cy="1645920"/>
+            <a:ext cx="10378440" cy="1298448"/>
           </a:xfrm>
           <a:prstGeom prst="roundRect">
             <a:avLst/>
@@ -6562,14 +6158,57 @@
       </p:sp>
       <p:sp>
         <p:nvSpPr>
-          <p:cNvPr id="5" name="TextBox 4"/>
+          <p:cNvPr id="5" name="Rectangle 4"/>
+          <p:cNvSpPr/>
+          <p:nvPr/>
+        </p:nvSpPr>
+        <p:spPr>
+          <a:xfrm>
+            <a:off x="914400" y="1325880"/>
+            <a:ext cx="54864" cy="1298448"/>
+          </a:xfrm>
+          <a:prstGeom prst="rect">
+            <a:avLst/>
+          </a:prstGeom>
+          <a:solidFill>
+            <a:srgbClr val="734AB8"/>
+          </a:solidFill>
+          <a:ln>
+            <a:noFill/>
+          </a:ln>
+        </p:spPr>
+        <p:style>
+          <a:lnRef idx="1">
+            <a:schemeClr val="accent1"/>
+          </a:lnRef>
+          <a:fillRef idx="3">
+            <a:schemeClr val="accent1"/>
+          </a:fillRef>
+          <a:effectRef idx="2">
+            <a:schemeClr val="accent1"/>
+          </a:effectRef>
+          <a:fontRef idx="minor">
+            <a:schemeClr val="lt1"/>
+          </a:fontRef>
+        </p:style>
+        <p:txBody>
+          <a:bodyPr rtlCol="0" anchor="ctr"/>
+          <a:lstStyle/>
+          <a:p>
+            <a:pPr algn="ctr"/>
+          </a:p>
+        </p:txBody>
+      </p:sp>
+      <p:sp>
+        <p:nvSpPr>
+          <p:cNvPr id="6" name="TextBox 5"/>
           <p:cNvSpPr txBox="1"/>
           <p:nvPr/>
         </p:nvSpPr>
         <p:spPr>
           <a:xfrm>
-            <a:off x="1115568" y="1435608"/>
-            <a:ext cx="3209544" cy="1463040"/>
+            <a:off x="1133856" y="1435608"/>
+            <a:ext cx="10049256" cy="1115568"/>
           </a:xfrm>
           <a:prstGeom prst="rect">
             <a:avLst/>
@@ -6584,17 +6223,17 @@
           <a:p>
             <a:pPr>
               <a:spcAft>
-                <a:spcPts val="200"/>
+                <a:spcPts val="100"/>
               </a:spcAft>
             </a:pPr>
             <a:r>
-              <a:rPr sz="1500" b="1">
+              <a:rPr sz="1600" b="1">
                 <a:solidFill>
                   <a:srgbClr val="1A365D"/>
                 </a:solidFill>
                 <a:latin typeface="Helvetica Neue"/>
               </a:rPr>
-              <a:t>Mix and Match</a:t>
+              <a:t>Mix and Match: A Novel FPGA-Centric Deep Neural Network Quantization Framework</a:t>
             </a:r>
           </a:p>
           <a:p>
@@ -6604,43 +6243,59 @@
               </a:spcAft>
             </a:pPr>
             <a:r>
-              <a:rPr sz="1200" b="0">
-                <a:solidFill>
-                  <a:srgbClr val="6B7280"/>
-                </a:solidFill>
-                <a:latin typeface="Helvetica Neue"/>
-              </a:rPr>
-              <a:t>FPGA-centric mixed-scheme quantization framework for efficient DNN acceleration.</a:t>
+              <a:rPr sz="1100" b="1">
+                <a:solidFill>
+                  <a:srgbClr val="734AB8"/>
+                </a:solidFill>
+                <a:latin typeface="Helvetica Neue"/>
+              </a:rPr>
+              <a:t>HPCA 2021  |  156 citations</a:t>
             </a:r>
           </a:p>
           <a:p>
             <a:pPr algn="l">
               <a:spcAft>
-                <a:spcPts val="0"/>
+                <a:spcPts val="300"/>
               </a:spcAft>
             </a:pPr>
             <a:r>
-              <a:rPr sz="1100" b="1">
-                <a:solidFill>
-                  <a:srgbClr val="734AB8"/>
-                </a:solidFill>
-                <a:latin typeface="Helvetica Neue"/>
-              </a:rPr>
-              <a:t>HPCA 2021  |  156 citations</a:t>
-            </a:r>
-          </a:p>
-        </p:txBody>
-      </p:sp>
-      <p:sp>
-        <p:nvSpPr>
-          <p:cNvPr id="6" name="Rounded Rectangle 5"/>
+              <a:rPr sz="1100" b="0">
+                <a:solidFill>
+                  <a:srgbClr val="6B7280"/>
+                </a:solidFill>
+                <a:latin typeface="Helvetica Neue"/>
+              </a:rPr>
+              <a:t>• Proposed an FPGA-centric quantization framework that mixes quantization schemes and precisions within a network.</a:t>
+            </a:r>
+          </a:p>
+          <a:p>
+            <a:pPr algn="l">
+              <a:spcAft>
+                <a:spcPts val="300"/>
+              </a:spcAft>
+            </a:pPr>
+            <a:r>
+              <a:rPr sz="1100" b="0">
+                <a:solidFill>
+                  <a:srgbClr val="6B7280"/>
+                </a:solidFill>
+                <a:latin typeface="Helvetica Neue"/>
+              </a:rPr>
+              <a:t>• Aligned model compression with actual accelerator behavior instead of optimizing only abstract algorithmic metrics.</a:t>
+            </a:r>
+          </a:p>
+        </p:txBody>
+      </p:sp>
+      <p:sp>
+        <p:nvSpPr>
+          <p:cNvPr id="7" name="Rounded Rectangle 6"/>
           <p:cNvSpPr/>
           <p:nvPr/>
         </p:nvSpPr>
         <p:spPr>
           <a:xfrm>
-            <a:off x="4572000" y="1325880"/>
-            <a:ext cx="3520440" cy="1645920"/>
+            <a:off x="914400" y="2788920"/>
+            <a:ext cx="10378440" cy="1298448"/>
           </a:xfrm>
           <a:prstGeom prst="roundRect">
             <a:avLst/>
@@ -6678,14 +6333,57 @@
       </p:sp>
       <p:sp>
         <p:nvSpPr>
-          <p:cNvPr id="7" name="TextBox 6"/>
+          <p:cNvPr id="8" name="Rectangle 7"/>
+          <p:cNvSpPr/>
+          <p:nvPr/>
+        </p:nvSpPr>
+        <p:spPr>
+          <a:xfrm>
+            <a:off x="914400" y="2788920"/>
+            <a:ext cx="54864" cy="1298448"/>
+          </a:xfrm>
+          <a:prstGeom prst="rect">
+            <a:avLst/>
+          </a:prstGeom>
+          <a:solidFill>
+            <a:srgbClr val="734AB8"/>
+          </a:solidFill>
+          <a:ln>
+            <a:noFill/>
+          </a:ln>
+        </p:spPr>
+        <p:style>
+          <a:lnRef idx="1">
+            <a:schemeClr val="accent1"/>
+          </a:lnRef>
+          <a:fillRef idx="3">
+            <a:schemeClr val="accent1"/>
+          </a:fillRef>
+          <a:effectRef idx="2">
+            <a:schemeClr val="accent1"/>
+          </a:effectRef>
+          <a:fontRef idx="minor">
+            <a:schemeClr val="lt1"/>
+          </a:fontRef>
+        </p:style>
+        <p:txBody>
+          <a:bodyPr rtlCol="0" anchor="ctr"/>
+          <a:lstStyle/>
+          <a:p>
+            <a:pPr algn="ctr"/>
+          </a:p>
+        </p:txBody>
+      </p:sp>
+      <p:sp>
+        <p:nvSpPr>
+          <p:cNvPr id="9" name="TextBox 8"/>
           <p:cNvSpPr txBox="1"/>
           <p:nvPr/>
         </p:nvSpPr>
         <p:spPr>
           <a:xfrm>
-            <a:off x="4773168" y="1435608"/>
-            <a:ext cx="3209544" cy="1463040"/>
+            <a:off x="1133856" y="2898648"/>
+            <a:ext cx="10049256" cy="1115568"/>
           </a:xfrm>
           <a:prstGeom prst="rect">
             <a:avLst/>
@@ -6700,17 +6398,17 @@
           <a:p>
             <a:pPr>
               <a:spcAft>
-                <a:spcPts val="200"/>
+                <a:spcPts val="100"/>
               </a:spcAft>
             </a:pPr>
             <a:r>
-              <a:rPr sz="1500" b="1">
+              <a:rPr sz="1600" b="1">
                 <a:solidFill>
                   <a:srgbClr val="1A365D"/>
                 </a:solidFill>
                 <a:latin typeface="Helvetica Neue"/>
               </a:rPr>
-              <a:t>FILM-QNN</a:t>
+              <a:t>FILM-QNN: Efficient FPGA Acceleration of Deep Neural Networks with Intra-Layer, Mixed-Precision Quantization</a:t>
             </a:r>
           </a:p>
           <a:p>
@@ -6720,43 +6418,59 @@
               </a:spcAft>
             </a:pPr>
             <a:r>
-              <a:rPr sz="1200" b="0">
-                <a:solidFill>
-                  <a:srgbClr val="6B7280"/>
-                </a:solidFill>
-                <a:latin typeface="Helvetica Neue"/>
-              </a:rPr>
-              <a:t>Intra-layer mixed-precision quantization for efficient FPGA deployment of deep networks.</a:t>
+              <a:rPr sz="1100" b="1">
+                <a:solidFill>
+                  <a:srgbClr val="734AB8"/>
+                </a:solidFill>
+                <a:latin typeface="Helvetica Neue"/>
+              </a:rPr>
+              <a:t>FPGA 2022  |  128 citations</a:t>
             </a:r>
           </a:p>
           <a:p>
             <a:pPr algn="l">
               <a:spcAft>
-                <a:spcPts val="0"/>
+                <a:spcPts val="300"/>
               </a:spcAft>
             </a:pPr>
             <a:r>
-              <a:rPr sz="1100" b="1">
-                <a:solidFill>
-                  <a:srgbClr val="734AB8"/>
-                </a:solidFill>
-                <a:latin typeface="Helvetica Neue"/>
-              </a:rPr>
-              <a:t>FPGA 2022  |  128 citations</a:t>
-            </a:r>
-          </a:p>
-        </p:txBody>
-      </p:sp>
-      <p:sp>
-        <p:nvSpPr>
-          <p:cNvPr id="8" name="Rounded Rectangle 7"/>
+              <a:rPr sz="1100" b="0">
+                <a:solidFill>
+                  <a:srgbClr val="6B7280"/>
+                </a:solidFill>
+                <a:latin typeface="Helvetica Neue"/>
+              </a:rPr>
+              <a:t>• Developed intra-layer mixed-precision quantization for efficient FPGA deployment of deep neural networks.</a:t>
+            </a:r>
+          </a:p>
+          <a:p>
+            <a:pPr algn="l">
+              <a:spcAft>
+                <a:spcPts val="300"/>
+              </a:spcAft>
+            </a:pPr>
+            <a:r>
+              <a:rPr sz="1100" b="0">
+                <a:solidFill>
+                  <a:srgbClr val="6B7280"/>
+                </a:solidFill>
+                <a:latin typeface="Helvetica Neue"/>
+              </a:rPr>
+              <a:t>• Improved hardware utilization and showed strong accuracy-efficiency trade-offs on real accelerator targets.</a:t>
+            </a:r>
+          </a:p>
+        </p:txBody>
+      </p:sp>
+      <p:sp>
+        <p:nvSpPr>
+          <p:cNvPr id="10" name="Rounded Rectangle 9"/>
           <p:cNvSpPr/>
           <p:nvPr/>
         </p:nvSpPr>
         <p:spPr>
           <a:xfrm>
-            <a:off x="8229600" y="1325880"/>
-            <a:ext cx="3063240" cy="1645920"/>
+            <a:off x="914400" y="4251960"/>
+            <a:ext cx="10378440" cy="1298448"/>
           </a:xfrm>
           <a:prstGeom prst="roundRect">
             <a:avLst/>
@@ -6794,246 +6508,14 @@
       </p:sp>
       <p:sp>
         <p:nvSpPr>
-          <p:cNvPr id="9" name="TextBox 8"/>
-          <p:cNvSpPr txBox="1"/>
-          <p:nvPr/>
-        </p:nvSpPr>
-        <p:spPr>
-          <a:xfrm>
-            <a:off x="8430768" y="1435608"/>
-            <a:ext cx="2752344" cy="1463040"/>
-          </a:xfrm>
-          <a:prstGeom prst="rect">
-            <a:avLst/>
-          </a:prstGeom>
-          <a:noFill/>
-        </p:spPr>
-        <p:txBody>
-          <a:bodyPr wrap="square">
-            <a:spAutoFit/>
-          </a:bodyPr>
-          <a:lstStyle/>
-          <a:p>
-            <a:pPr>
-              <a:spcAft>
-                <a:spcPts val="200"/>
-              </a:spcAft>
-            </a:pPr>
-            <a:r>
-              <a:rPr sz="1500" b="1">
-                <a:solidFill>
-                  <a:srgbClr val="1A365D"/>
-                </a:solidFill>
-                <a:latin typeface="Helvetica Neue"/>
-              </a:rPr>
-              <a:t>Auto-ViT-Acc</a:t>
-            </a:r>
-          </a:p>
-          <a:p>
-            <a:pPr algn="l">
-              <a:spcAft>
-                <a:spcPts val="600"/>
-              </a:spcAft>
-            </a:pPr>
-            <a:r>
-              <a:rPr sz="1200" b="0">
-                <a:solidFill>
-                  <a:srgbClr val="6B7280"/>
-                </a:solidFill>
-                <a:latin typeface="Helvetica Neue"/>
-              </a:rPr>
-              <a:t>FPGA-aware acceleration framework for vision transformers with mixed-scheme quantization.</a:t>
-            </a:r>
-          </a:p>
-          <a:p>
-            <a:pPr algn="l">
-              <a:spcAft>
-                <a:spcPts val="0"/>
-              </a:spcAft>
-            </a:pPr>
-            <a:r>
-              <a:rPr sz="1100" b="1">
-                <a:solidFill>
-                  <a:srgbClr val="734AB8"/>
-                </a:solidFill>
-                <a:latin typeface="Helvetica Neue"/>
-              </a:rPr>
-              <a:t>FPL 2022  |  104 citations</a:t>
-            </a:r>
-          </a:p>
-        </p:txBody>
-      </p:sp>
-      <p:sp>
-        <p:nvSpPr>
-          <p:cNvPr id="10" name="Rounded Rectangle 9"/>
+          <p:cNvPr id="11" name="Rectangle 10"/>
           <p:cNvSpPr/>
           <p:nvPr/>
         </p:nvSpPr>
         <p:spPr>
           <a:xfrm>
-            <a:off x="914400" y="3337560"/>
-            <a:ext cx="3520440" cy="1645920"/>
-          </a:xfrm>
-          <a:prstGeom prst="roundRect">
-            <a:avLst/>
-          </a:prstGeom>
-          <a:solidFill>
-            <a:srgbClr val="F4F7FB"/>
-          </a:solidFill>
-          <a:ln w="12700">
-            <a:solidFill>
-              <a:srgbClr val="F4F7FB"/>
-            </a:solidFill>
-          </a:ln>
-        </p:spPr>
-        <p:style>
-          <a:lnRef idx="1">
-            <a:schemeClr val="accent1"/>
-          </a:lnRef>
-          <a:fillRef idx="3">
-            <a:schemeClr val="accent1"/>
-          </a:fillRef>
-          <a:effectRef idx="2">
-            <a:schemeClr val="accent1"/>
-          </a:effectRef>
-          <a:fontRef idx="minor">
-            <a:schemeClr val="lt1"/>
-          </a:fontRef>
-        </p:style>
-        <p:txBody>
-          <a:bodyPr rtlCol="0" anchor="ctr"/>
-          <a:lstStyle/>
-          <a:p>
-            <a:pPr algn="ctr"/>
-          </a:p>
-        </p:txBody>
-      </p:sp>
-      <p:sp>
-        <p:nvSpPr>
-          <p:cNvPr id="11" name="TextBox 10"/>
-          <p:cNvSpPr txBox="1"/>
-          <p:nvPr/>
-        </p:nvSpPr>
-        <p:spPr>
-          <a:xfrm>
-            <a:off x="1115568" y="3447288"/>
-            <a:ext cx="3209544" cy="1463040"/>
-          </a:xfrm>
-          <a:prstGeom prst="rect">
-            <a:avLst/>
-          </a:prstGeom>
-          <a:noFill/>
-        </p:spPr>
-        <p:txBody>
-          <a:bodyPr wrap="square">
-            <a:spAutoFit/>
-          </a:bodyPr>
-          <a:lstStyle/>
-          <a:p>
-            <a:pPr>
-              <a:spcAft>
-                <a:spcPts val="200"/>
-              </a:spcAft>
-            </a:pPr>
-            <a:r>
-              <a:rPr sz="1500" b="1">
-                <a:solidFill>
-                  <a:srgbClr val="1A365D"/>
-                </a:solidFill>
-                <a:latin typeface="Helvetica Neue"/>
-              </a:rPr>
-              <a:t>Layer Freezing and Data Sieving</a:t>
-            </a:r>
-          </a:p>
-          <a:p>
-            <a:pPr algn="l">
-              <a:spcAft>
-                <a:spcPts val="600"/>
-              </a:spcAft>
-            </a:pPr>
-            <a:r>
-              <a:rPr sz="1200" b="0">
-                <a:solidFill>
-                  <a:srgbClr val="6B7280"/>
-                </a:solidFill>
-                <a:latin typeface="Helvetica Neue"/>
-              </a:rPr>
-              <a:t>Sparse training framework that combines layer freezing with data sieving for efficiency.</a:t>
-            </a:r>
-          </a:p>
-          <a:p>
-            <a:pPr algn="l">
-              <a:spcAft>
-                <a:spcPts val="0"/>
-              </a:spcAft>
-            </a:pPr>
-            <a:r>
-              <a:rPr sz="1100" b="1">
-                <a:solidFill>
-                  <a:srgbClr val="734AB8"/>
-                </a:solidFill>
-                <a:latin typeface="Helvetica Neue"/>
-              </a:rPr>
-              <a:t>NeurIPS 2022  |  36 citations</a:t>
-            </a:r>
-          </a:p>
-        </p:txBody>
-      </p:sp>
-      <p:sp>
-        <p:nvSpPr>
-          <p:cNvPr id="12" name="Rounded Rectangle 11"/>
-          <p:cNvSpPr/>
-          <p:nvPr/>
-        </p:nvSpPr>
-        <p:spPr>
-          <a:xfrm>
-            <a:off x="4572000" y="3246120"/>
-            <a:ext cx="6720840" cy="1828800"/>
-          </a:xfrm>
-          <a:prstGeom prst="roundRect">
-            <a:avLst/>
-          </a:prstGeom>
-          <a:solidFill>
-            <a:srgbClr val="FAFBFD"/>
-          </a:solidFill>
-          <a:ln w="12700">
-            <a:solidFill>
-              <a:srgbClr val="E2E8F0"/>
-            </a:solidFill>
-          </a:ln>
-        </p:spPr>
-        <p:style>
-          <a:lnRef idx="1">
-            <a:schemeClr val="accent1"/>
-          </a:lnRef>
-          <a:fillRef idx="3">
-            <a:schemeClr val="accent1"/>
-          </a:fillRef>
-          <a:effectRef idx="2">
-            <a:schemeClr val="accent1"/>
-          </a:effectRef>
-          <a:fontRef idx="minor">
-            <a:schemeClr val="lt1"/>
-          </a:fontRef>
-        </p:style>
-        <p:txBody>
-          <a:bodyPr rtlCol="0" anchor="ctr"/>
-          <a:lstStyle/>
-          <a:p>
-            <a:pPr algn="ctr"/>
-          </a:p>
-        </p:txBody>
-      </p:sp>
-      <p:sp>
-        <p:nvSpPr>
-          <p:cNvPr id="13" name="Rectangle 12"/>
-          <p:cNvSpPr/>
-          <p:nvPr/>
-        </p:nvSpPr>
-        <p:spPr>
-          <a:xfrm>
-            <a:off x="4572000" y="3246120"/>
-            <a:ext cx="54864" cy="1828800"/>
+            <a:off x="914400" y="4251960"/>
+            <a:ext cx="54864" cy="1298448"/>
           </a:xfrm>
           <a:prstGeom prst="rect">
             <a:avLst/>
@@ -7069,14 +6551,14 @@
       </p:sp>
       <p:sp>
         <p:nvSpPr>
-          <p:cNvPr id="14" name="TextBox 13"/>
+          <p:cNvPr id="12" name="TextBox 11"/>
           <p:cNvSpPr txBox="1"/>
           <p:nvPr/>
         </p:nvSpPr>
         <p:spPr>
           <a:xfrm>
-            <a:off x="4791456" y="3410712"/>
-            <a:ext cx="6400800" cy="1572768"/>
+            <a:off x="1133856" y="4361688"/>
+            <a:ext cx="10049256" cy="1115568"/>
           </a:xfrm>
           <a:prstGeom prst="rect">
             <a:avLst/>
@@ -7091,65 +6573,99 @@
           <a:p>
             <a:pPr>
               <a:spcAft>
-                <a:spcPts val="800"/>
+                <a:spcPts val="100"/>
               </a:spcAft>
             </a:pPr>
             <a:r>
-              <a:rPr sz="1900" b="1">
+              <a:rPr sz="1600" b="1">
                 <a:solidFill>
                   <a:srgbClr val="1A365D"/>
                 </a:solidFill>
                 <a:latin typeface="Helvetica Neue"/>
               </a:rPr>
-              <a:t>Systems Perspective</a:t>
+              <a:t>Auto-ViT-Acc: An FPGA-Aware Automatic Acceleration Framework for Vision Transformer with Mixed-Scheme Quantization</a:t>
             </a:r>
           </a:p>
           <a:p>
             <a:pPr algn="l">
               <a:spcAft>
-                <a:spcPts val="500"/>
+                <a:spcPts val="600"/>
               </a:spcAft>
             </a:pPr>
             <a:r>
-              <a:rPr sz="1300" b="0">
-                <a:solidFill>
-                  <a:srgbClr val="6B7280"/>
-                </a:solidFill>
-                <a:latin typeface="Helvetica Neue"/>
-              </a:rPr>
-              <a:t>• Compression methods are developed with deployment constraints in mind: latency, memory, and energy.</a:t>
+              <a:rPr sz="1100" b="1">
+                <a:solidFill>
+                  <a:srgbClr val="734AB8"/>
+                </a:solidFill>
+                <a:latin typeface="Helvetica Neue"/>
+              </a:rPr>
+              <a:t>FPL 2022  |  104 citations</a:t>
             </a:r>
           </a:p>
           <a:p>
             <a:pPr algn="l">
               <a:spcAft>
-                <a:spcPts val="500"/>
+                <a:spcPts val="300"/>
               </a:spcAft>
             </a:pPr>
             <a:r>
-              <a:rPr sz="1300" b="0">
+              <a:rPr sz="1100" b="0">
                 <a:solidFill>
                   <a:srgbClr val="6B7280"/>
                 </a:solidFill>
                 <a:latin typeface="Helvetica Neue"/>
               </a:rPr>
-              <a:t>• The same optimization perspective carries into diffusion model acceleration and on-device video generation.</a:t>
+              <a:t>• Built an FPGA-aware acceleration framework for vision transformers using mixed-scheme quantization and automatic mapping.</a:t>
             </a:r>
           </a:p>
           <a:p>
             <a:pPr algn="l">
               <a:spcAft>
-                <a:spcPts val="500"/>
+                <a:spcPts val="300"/>
               </a:spcAft>
             </a:pPr>
             <a:r>
-              <a:rPr sz="1300" b="0">
+              <a:rPr sz="1100" b="0">
                 <a:solidFill>
                   <a:srgbClr val="6B7280"/>
                 </a:solidFill>
                 <a:latin typeface="Helvetica Neue"/>
               </a:rPr>
-              <a:t>• Work spans algorithm design, mixed precision, architecture search, and reconfigurable hardware acceleration.</a:t>
+              <a:t>• Extended hardware-aware optimization from CNNs to transformer inference and practical deployment.</a:t>
+            </a:r>
+          </a:p>
+        </p:txBody>
+      </p:sp>
+      <p:sp>
+        <p:nvSpPr>
+          <p:cNvPr id="13" name="TextBox 12"/>
+          <p:cNvSpPr txBox="1"/>
+          <p:nvPr/>
+        </p:nvSpPr>
+        <p:spPr>
+          <a:xfrm>
+            <a:off x="914400" y="5715000"/>
+            <a:ext cx="10241280" cy="457200"/>
+          </a:xfrm>
+          <a:prstGeom prst="rect">
+            <a:avLst/>
+          </a:prstGeom>
+          <a:noFill/>
+        </p:spPr>
+        <p:txBody>
+          <a:bodyPr wrap="none">
+            <a:spAutoFit/>
+          </a:bodyPr>
+          <a:lstStyle/>
+          <a:p>
+            <a:r>
+              <a:rPr sz="1100" b="0">
+                <a:solidFill>
+                  <a:srgbClr val="6B7280"/>
+                </a:solidFill>
+                <a:latin typeface="Helvetica Neue"/>
+              </a:rPr>
+              <a:t>Other related work: Layer Freezing and Data Sieving (NeurIPS 2022), NPAS (CVPR 2021), RMSMP (ICCV 2021), and SDA (FPL 2024).</a:t>
             </a:r>
           </a:p>
         </p:txBody>
@@ -7163,1096 +6679,6 @@
 </file>
 
 <file path=ppt/slides/slide7.xml><?xml version="1.0" encoding="utf-8"?>
-<p:sld xmlns:a="http://schemas.openxmlformats.org/drawingml/2006/main" xmlns:p="http://schemas.openxmlformats.org/presentationml/2006/main" xmlns:r="http://schemas.openxmlformats.org/officeDocument/2006/relationships">
-  <p:cSld>
-    <p:bg>
-      <p:bgPr>
-        <a:solidFill>
-          <a:srgbClr val="FFFFFF"/>
-        </a:solidFill>
-        <a:effectLst/>
-      </p:bgPr>
-    </p:bg>
-    <p:spTree>
-      <p:nvGrpSpPr>
-        <p:cNvPr id="1" name=""/>
-        <p:cNvGrpSpPr/>
-        <p:nvPr/>
-      </p:nvGrpSpPr>
-      <p:grpSpPr/>
-      <p:sp>
-        <p:nvSpPr>
-          <p:cNvPr id="2" name="Rectangle 1"/>
-          <p:cNvSpPr/>
-          <p:nvPr/>
-        </p:nvSpPr>
-        <p:spPr>
-          <a:xfrm>
-            <a:off x="731520" y="502920"/>
-            <a:ext cx="73152" cy="438912"/>
-          </a:xfrm>
-          <a:prstGeom prst="rect">
-            <a:avLst/>
-          </a:prstGeom>
-          <a:solidFill>
-            <a:srgbClr val="2B6CB0"/>
-          </a:solidFill>
-          <a:ln>
-            <a:noFill/>
-          </a:ln>
-        </p:spPr>
-        <p:style>
-          <a:lnRef idx="1">
-            <a:schemeClr val="accent1"/>
-          </a:lnRef>
-          <a:fillRef idx="3">
-            <a:schemeClr val="accent1"/>
-          </a:fillRef>
-          <a:effectRef idx="2">
-            <a:schemeClr val="accent1"/>
-          </a:effectRef>
-          <a:fontRef idx="minor">
-            <a:schemeClr val="lt1"/>
-          </a:fontRef>
-        </p:style>
-        <p:txBody>
-          <a:bodyPr rtlCol="0" anchor="ctr"/>
-          <a:lstStyle/>
-          <a:p>
-            <a:pPr algn="ctr"/>
-          </a:p>
-        </p:txBody>
-      </p:sp>
-      <p:sp>
-        <p:nvSpPr>
-          <p:cNvPr id="3" name="TextBox 2"/>
-          <p:cNvSpPr txBox="1"/>
-          <p:nvPr/>
-        </p:nvSpPr>
-        <p:spPr>
-          <a:xfrm>
-            <a:off x="987552" y="384048"/>
-            <a:ext cx="10241280" cy="594360"/>
-          </a:xfrm>
-          <a:prstGeom prst="rect">
-            <a:avLst/>
-          </a:prstGeom>
-          <a:noFill/>
-        </p:spPr>
-        <p:txBody>
-          <a:bodyPr wrap="none">
-            <a:spAutoFit/>
-          </a:bodyPr>
-          <a:lstStyle/>
-          <a:p>
-            <a:r>
-              <a:rPr sz="3000" b="1">
-                <a:solidFill>
-                  <a:srgbClr val="1A365D"/>
-                </a:solidFill>
-                <a:latin typeface="Helvetica Neue"/>
-              </a:rPr>
-              <a:t>Research Impact and Representative Publications</a:t>
-            </a:r>
-          </a:p>
-          <a:p>
-            <a:pPr algn="l">
-              <a:spcAft>
-                <a:spcPts val="0"/>
-              </a:spcAft>
-            </a:pPr>
-            <a:r>
-              <a:rPr sz="1500" b="0">
-                <a:solidFill>
-                  <a:srgbClr val="6B7280"/>
-                </a:solidFill>
-                <a:latin typeface="Helvetica Neue"/>
-              </a:rPr>
-              <a:t>Selected paper influence from the public Google Scholar profile (March 2026).</a:t>
-            </a:r>
-          </a:p>
-        </p:txBody>
-      </p:sp>
-      <p:sp>
-        <p:nvSpPr>
-          <p:cNvPr id="4" name="Rounded Rectangle 3"/>
-          <p:cNvSpPr/>
-          <p:nvPr/>
-        </p:nvSpPr>
-        <p:spPr>
-          <a:xfrm>
-            <a:off x="914400" y="1325880"/>
-            <a:ext cx="5074920" cy="4480560"/>
-          </a:xfrm>
-          <a:prstGeom prst="roundRect">
-            <a:avLst/>
-          </a:prstGeom>
-          <a:solidFill>
-            <a:srgbClr val="FAFBFD"/>
-          </a:solidFill>
-          <a:ln w="12700">
-            <a:solidFill>
-              <a:srgbClr val="E2E8F0"/>
-            </a:solidFill>
-          </a:ln>
-        </p:spPr>
-        <p:style>
-          <a:lnRef idx="1">
-            <a:schemeClr val="accent1"/>
-          </a:lnRef>
-          <a:fillRef idx="3">
-            <a:schemeClr val="accent1"/>
-          </a:fillRef>
-          <a:effectRef idx="2">
-            <a:schemeClr val="accent1"/>
-          </a:effectRef>
-          <a:fontRef idx="minor">
-            <a:schemeClr val="lt1"/>
-          </a:fontRef>
-        </p:style>
-        <p:txBody>
-          <a:bodyPr rtlCol="0" anchor="ctr"/>
-          <a:lstStyle/>
-          <a:p>
-            <a:pPr algn="ctr"/>
-          </a:p>
-        </p:txBody>
-      </p:sp>
-      <p:sp>
-        <p:nvSpPr>
-          <p:cNvPr id="5" name="TextBox 4"/>
-          <p:cNvSpPr txBox="1"/>
-          <p:nvPr/>
-        </p:nvSpPr>
-        <p:spPr>
-          <a:xfrm>
-            <a:off x="1115568" y="1490472"/>
-            <a:ext cx="4764024" cy="4224528"/>
-          </a:xfrm>
-          <a:prstGeom prst="rect">
-            <a:avLst/>
-          </a:prstGeom>
-          <a:noFill/>
-        </p:spPr>
-        <p:txBody>
-          <a:bodyPr wrap="square">
-            <a:spAutoFit/>
-          </a:bodyPr>
-          <a:lstStyle/>
-          <a:p>
-            <a:pPr>
-              <a:spcAft>
-                <a:spcPts val="800"/>
-              </a:spcAft>
-            </a:pPr>
-            <a:r>
-              <a:rPr sz="1800" b="1">
-                <a:solidFill>
-                  <a:srgbClr val="1A365D"/>
-                </a:solidFill>
-                <a:latin typeface="Helvetica Neue"/>
-              </a:rPr>
-              <a:t>Highly Cited Contributions</a:t>
-            </a:r>
-          </a:p>
-          <a:p>
-            <a:pPr algn="l">
-              <a:spcAft>
-                <a:spcPts val="500"/>
-              </a:spcAft>
-            </a:pPr>
-            <a:r>
-              <a:rPr sz="1200" b="0">
-                <a:solidFill>
-                  <a:srgbClr val="6B7280"/>
-                </a:solidFill>
-                <a:latin typeface="Helvetica Neue"/>
-              </a:rPr>
-              <a:t>EfficientFormer (NeurIPS 2022) — 764 citations</a:t>
-            </a:r>
-          </a:p>
-          <a:p>
-            <a:pPr algn="l">
-              <a:spcAft>
-                <a:spcPts val="500"/>
-              </a:spcAft>
-            </a:pPr>
-            <a:r>
-              <a:rPr sz="1200" b="0">
-                <a:solidFill>
-                  <a:srgbClr val="6B7280"/>
-                </a:solidFill>
-                <a:latin typeface="Helvetica Neue"/>
-              </a:rPr>
-              <a:t>EfficientFormerV2 (ICCV 2023) — 428 citations</a:t>
-            </a:r>
-          </a:p>
-          <a:p>
-            <a:pPr algn="l">
-              <a:spcAft>
-                <a:spcPts val="500"/>
-              </a:spcAft>
-            </a:pPr>
-            <a:r>
-              <a:rPr sz="1200" b="0">
-                <a:solidFill>
-                  <a:srgbClr val="6B7280"/>
-                </a:solidFill>
-                <a:latin typeface="Helvetica Neue"/>
-              </a:rPr>
-              <a:t>SnapFusion (NeurIPS 2023) — 305 citations</a:t>
-            </a:r>
-          </a:p>
-          <a:p>
-            <a:pPr algn="l">
-              <a:spcAft>
-                <a:spcPts val="500"/>
-              </a:spcAft>
-            </a:pPr>
-            <a:r>
-              <a:rPr sz="1200" b="0">
-                <a:solidFill>
-                  <a:srgbClr val="6B7280"/>
-                </a:solidFill>
-                <a:latin typeface="Helvetica Neue"/>
-              </a:rPr>
-              <a:t>Mix and Match (HPCA 2021) — 156 citations</a:t>
-            </a:r>
-          </a:p>
-          <a:p>
-            <a:pPr algn="l">
-              <a:spcAft>
-                <a:spcPts val="500"/>
-              </a:spcAft>
-            </a:pPr>
-            <a:r>
-              <a:rPr sz="1200" b="0">
-                <a:solidFill>
-                  <a:srgbClr val="6B7280"/>
-                </a:solidFill>
-                <a:latin typeface="Helvetica Neue"/>
-              </a:rPr>
-              <a:t>FILM-QNN (FPGA 2022) — 128 citations</a:t>
-            </a:r>
-          </a:p>
-          <a:p>
-            <a:pPr algn="l">
-              <a:spcAft>
-                <a:spcPts val="500"/>
-              </a:spcAft>
-            </a:pPr>
-            <a:r>
-              <a:rPr sz="1200" b="0">
-                <a:solidFill>
-                  <a:srgbClr val="6B7280"/>
-                </a:solidFill>
-                <a:latin typeface="Helvetica Neue"/>
-              </a:rPr>
-              <a:t>Auto-ViT-Acc (FPL 2022) — 104 citations</a:t>
-            </a:r>
-          </a:p>
-          <a:p>
-            <a:pPr algn="l">
-              <a:spcAft>
-                <a:spcPts val="500"/>
-              </a:spcAft>
-            </a:pPr>
-            <a:r>
-              <a:rPr sz="1200" b="0">
-                <a:solidFill>
-                  <a:srgbClr val="6B7280"/>
-                </a:solidFill>
-                <a:latin typeface="Helvetica Neue"/>
-              </a:rPr>
-              <a:t>HyperHuman (ICLR 2024) — 83 citations</a:t>
-            </a:r>
-          </a:p>
-          <a:p>
-            <a:pPr algn="l">
-              <a:spcAft>
-                <a:spcPts val="500"/>
-              </a:spcAft>
-            </a:pPr>
-            <a:r>
-              <a:rPr sz="1200" b="0">
-                <a:solidFill>
-                  <a:srgbClr val="6B7280"/>
-                </a:solidFill>
-                <a:latin typeface="Helvetica Neue"/>
-              </a:rPr>
-              <a:t>Pruning-as-Search (IJCAI 2022) — 78 citations</a:t>
-            </a:r>
-          </a:p>
-        </p:txBody>
-      </p:sp>
-      <p:sp>
-        <p:nvSpPr>
-          <p:cNvPr id="6" name="Rounded Rectangle 5"/>
-          <p:cNvSpPr/>
-          <p:nvPr/>
-        </p:nvSpPr>
-        <p:spPr>
-          <a:xfrm>
-            <a:off x="6217920" y="1325880"/>
-            <a:ext cx="5074920" cy="4480560"/>
-          </a:xfrm>
-          <a:prstGeom prst="roundRect">
-            <a:avLst/>
-          </a:prstGeom>
-          <a:solidFill>
-            <a:srgbClr val="FAFBFD"/>
-          </a:solidFill>
-          <a:ln w="12700">
-            <a:solidFill>
-              <a:srgbClr val="E2E8F0"/>
-            </a:solidFill>
-          </a:ln>
-        </p:spPr>
-        <p:style>
-          <a:lnRef idx="1">
-            <a:schemeClr val="accent1"/>
-          </a:lnRef>
-          <a:fillRef idx="3">
-            <a:schemeClr val="accent1"/>
-          </a:fillRef>
-          <a:effectRef idx="2">
-            <a:schemeClr val="accent1"/>
-          </a:effectRef>
-          <a:fontRef idx="minor">
-            <a:schemeClr val="lt1"/>
-          </a:fontRef>
-        </p:style>
-        <p:txBody>
-          <a:bodyPr rtlCol="0" anchor="ctr"/>
-          <a:lstStyle/>
-          <a:p>
-            <a:pPr algn="ctr"/>
-          </a:p>
-        </p:txBody>
-      </p:sp>
-      <p:sp>
-        <p:nvSpPr>
-          <p:cNvPr id="7" name="TextBox 6"/>
-          <p:cNvSpPr txBox="1"/>
-          <p:nvPr/>
-        </p:nvSpPr>
-        <p:spPr>
-          <a:xfrm>
-            <a:off x="6419088" y="1490472"/>
-            <a:ext cx="4764024" cy="4224528"/>
-          </a:xfrm>
-          <a:prstGeom prst="rect">
-            <a:avLst/>
-          </a:prstGeom>
-          <a:noFill/>
-        </p:spPr>
-        <p:txBody>
-          <a:bodyPr wrap="square">
-            <a:spAutoFit/>
-          </a:bodyPr>
-          <a:lstStyle/>
-          <a:p>
-            <a:pPr>
-              <a:spcAft>
-                <a:spcPts val="800"/>
-              </a:spcAft>
-            </a:pPr>
-            <a:r>
-              <a:rPr sz="1800" b="1">
-                <a:solidFill>
-                  <a:srgbClr val="1A365D"/>
-                </a:solidFill>
-                <a:latin typeface="Helvetica Neue"/>
-              </a:rPr>
-              <a:t>Recent Generative and Systems Work</a:t>
-            </a:r>
-          </a:p>
-          <a:p>
-            <a:pPr algn="l">
-              <a:spcAft>
-                <a:spcPts val="500"/>
-              </a:spcAft>
-            </a:pPr>
-            <a:r>
-              <a:rPr sz="1200" b="0">
-                <a:solidFill>
-                  <a:srgbClr val="6B7280"/>
-                </a:solidFill>
-                <a:latin typeface="Helvetica Neue"/>
-              </a:rPr>
-              <a:t>LazyDiT (AAAI 2025) — 49 citations</a:t>
-            </a:r>
-          </a:p>
-          <a:p>
-            <a:pPr algn="l">
-              <a:spcAft>
-                <a:spcPts val="500"/>
-              </a:spcAft>
-            </a:pPr>
-            <a:r>
-              <a:rPr sz="1200" b="0">
-                <a:solidFill>
-                  <a:srgbClr val="6B7280"/>
-                </a:solidFill>
-                <a:latin typeface="Helvetica Neue"/>
-              </a:rPr>
-              <a:t>BitsFusion (NeurIPS 2024) — 43 citations</a:t>
-            </a:r>
-          </a:p>
-          <a:p>
-            <a:pPr algn="l">
-              <a:spcAft>
-                <a:spcPts val="500"/>
-              </a:spcAft>
-            </a:pPr>
-            <a:r>
-              <a:rPr sz="1200" b="0">
-                <a:solidFill>
-                  <a:srgbClr val="6B7280"/>
-                </a:solidFill>
-                <a:latin typeface="Helvetica Neue"/>
-              </a:rPr>
-              <a:t>TextCraftor (CVPR 2024) — 32 citations</a:t>
-            </a:r>
-          </a:p>
-          <a:p>
-            <a:pPr algn="l">
-              <a:spcAft>
-                <a:spcPts val="500"/>
-              </a:spcAft>
-            </a:pPr>
-            <a:r>
-              <a:rPr sz="1200" b="0">
-                <a:solidFill>
-                  <a:srgbClr val="6B7280"/>
-                </a:solidFill>
-                <a:latin typeface="Helvetica Neue"/>
-              </a:rPr>
-              <a:t>SF-V (NeurIPS 2024) — 31 citations</a:t>
-            </a:r>
-          </a:p>
-          <a:p>
-            <a:pPr algn="l">
-              <a:spcAft>
-                <a:spcPts val="500"/>
-              </a:spcAft>
-            </a:pPr>
-            <a:r>
-              <a:rPr sz="1200" b="0">
-                <a:solidFill>
-                  <a:srgbClr val="6B7280"/>
-                </a:solidFill>
-                <a:latin typeface="Helvetica Neue"/>
-              </a:rPr>
-              <a:t>SnapGen (CVPR 2025) — 21 citations</a:t>
-            </a:r>
-          </a:p>
-          <a:p>
-            <a:pPr algn="l">
-              <a:spcAft>
-                <a:spcPts val="500"/>
-              </a:spcAft>
-            </a:pPr>
-            <a:r>
-              <a:rPr sz="1200" b="0">
-                <a:solidFill>
-                  <a:srgbClr val="6B7280"/>
-                </a:solidFill>
-                <a:latin typeface="Helvetica Neue"/>
-              </a:rPr>
-              <a:t>SnapGen-V (CVPR 2025) — 19 citations</a:t>
-            </a:r>
-          </a:p>
-          <a:p>
-            <a:pPr algn="l">
-              <a:spcAft>
-                <a:spcPts val="500"/>
-              </a:spcAft>
-            </a:pPr>
-            <a:r>
-              <a:rPr sz="1200" b="0">
-                <a:solidFill>
-                  <a:srgbClr val="6B7280"/>
-                </a:solidFill>
-                <a:latin typeface="Helvetica Neue"/>
-              </a:rPr>
-              <a:t>SDA (FPL 2024) — 20 citations</a:t>
-            </a:r>
-          </a:p>
-          <a:p>
-            <a:pPr algn="l">
-              <a:spcAft>
-                <a:spcPts val="500"/>
-              </a:spcAft>
-            </a:pPr>
-            <a:r>
-              <a:rPr sz="1200" b="0">
-                <a:solidFill>
-                  <a:srgbClr val="6B7280"/>
-                </a:solidFill>
-                <a:latin typeface="Helvetica Neue"/>
-              </a:rPr>
-              <a:t>Towards Real-Time Segmentation on the Edge (AAAI 2023) — 25 citations</a:t>
-            </a:r>
-          </a:p>
-        </p:txBody>
-      </p:sp>
-    </p:spTree>
-  </p:cSld>
-  <p:clrMapOvr>
-    <a:masterClrMapping/>
-  </p:clrMapOvr>
-</p:sld>
-</file>
-
-<file path=ppt/slides/slide8.xml><?xml version="1.0" encoding="utf-8"?>
-<p:sld xmlns:a="http://schemas.openxmlformats.org/drawingml/2006/main" xmlns:p="http://schemas.openxmlformats.org/presentationml/2006/main" xmlns:r="http://schemas.openxmlformats.org/officeDocument/2006/relationships">
-  <p:cSld>
-    <p:bg>
-      <p:bgPr>
-        <a:solidFill>
-          <a:srgbClr val="FFFFFF"/>
-        </a:solidFill>
-        <a:effectLst/>
-      </p:bgPr>
-    </p:bg>
-    <p:spTree>
-      <p:nvGrpSpPr>
-        <p:cNvPr id="1" name=""/>
-        <p:cNvGrpSpPr/>
-        <p:nvPr/>
-      </p:nvGrpSpPr>
-      <p:grpSpPr/>
-      <p:sp>
-        <p:nvSpPr>
-          <p:cNvPr id="2" name="Rectangle 1"/>
-          <p:cNvSpPr/>
-          <p:nvPr/>
-        </p:nvSpPr>
-        <p:spPr>
-          <a:xfrm>
-            <a:off x="731520" y="502920"/>
-            <a:ext cx="73152" cy="438912"/>
-          </a:xfrm>
-          <a:prstGeom prst="rect">
-            <a:avLst/>
-          </a:prstGeom>
-          <a:solidFill>
-            <a:srgbClr val="2B6CB0"/>
-          </a:solidFill>
-          <a:ln>
-            <a:noFill/>
-          </a:ln>
-        </p:spPr>
-        <p:style>
-          <a:lnRef idx="1">
-            <a:schemeClr val="accent1"/>
-          </a:lnRef>
-          <a:fillRef idx="3">
-            <a:schemeClr val="accent1"/>
-          </a:fillRef>
-          <a:effectRef idx="2">
-            <a:schemeClr val="accent1"/>
-          </a:effectRef>
-          <a:fontRef idx="minor">
-            <a:schemeClr val="lt1"/>
-          </a:fontRef>
-        </p:style>
-        <p:txBody>
-          <a:bodyPr rtlCol="0" anchor="ctr"/>
-          <a:lstStyle/>
-          <a:p>
-            <a:pPr algn="ctr"/>
-          </a:p>
-        </p:txBody>
-      </p:sp>
-      <p:sp>
-        <p:nvSpPr>
-          <p:cNvPr id="3" name="TextBox 2"/>
-          <p:cNvSpPr txBox="1"/>
-          <p:nvPr/>
-        </p:nvSpPr>
-        <p:spPr>
-          <a:xfrm>
-            <a:off x="987552" y="384048"/>
-            <a:ext cx="10241280" cy="594360"/>
-          </a:xfrm>
-          <a:prstGeom prst="rect">
-            <a:avLst/>
-          </a:prstGeom>
-          <a:noFill/>
-        </p:spPr>
-        <p:txBody>
-          <a:bodyPr wrap="none">
-            <a:spAutoFit/>
-          </a:bodyPr>
-          <a:lstStyle/>
-          <a:p>
-            <a:r>
-              <a:rPr sz="3000" b="1">
-                <a:solidFill>
-                  <a:srgbClr val="1A365D"/>
-                </a:solidFill>
-                <a:latin typeface="Helvetica Neue"/>
-              </a:rPr>
-              <a:t>Patents, Service, and Collaboration</a:t>
-            </a:r>
-          </a:p>
-          <a:p>
-            <a:pPr algn="l">
-              <a:spcAft>
-                <a:spcPts val="0"/>
-              </a:spcAft>
-            </a:pPr>
-            <a:r>
-              <a:rPr sz="1500" b="0">
-                <a:solidFill>
-                  <a:srgbClr val="6B7280"/>
-                </a:solidFill>
-                <a:latin typeface="Helvetica Neue"/>
-              </a:rPr>
-              <a:t>Professional activities beyond publications.</a:t>
-            </a:r>
-          </a:p>
-        </p:txBody>
-      </p:sp>
-      <p:sp>
-        <p:nvSpPr>
-          <p:cNvPr id="4" name="Rounded Rectangle 3"/>
-          <p:cNvSpPr/>
-          <p:nvPr/>
-        </p:nvSpPr>
-        <p:spPr>
-          <a:xfrm>
-            <a:off x="914400" y="1325880"/>
-            <a:ext cx="5303520" cy="4389120"/>
-          </a:xfrm>
-          <a:prstGeom prst="roundRect">
-            <a:avLst/>
-          </a:prstGeom>
-          <a:solidFill>
-            <a:srgbClr val="FAFBFD"/>
-          </a:solidFill>
-          <a:ln w="12700">
-            <a:solidFill>
-              <a:srgbClr val="E2E8F0"/>
-            </a:solidFill>
-          </a:ln>
-        </p:spPr>
-        <p:style>
-          <a:lnRef idx="1">
-            <a:schemeClr val="accent1"/>
-          </a:lnRef>
-          <a:fillRef idx="3">
-            <a:schemeClr val="accent1"/>
-          </a:fillRef>
-          <a:effectRef idx="2">
-            <a:schemeClr val="accent1"/>
-          </a:effectRef>
-          <a:fontRef idx="minor">
-            <a:schemeClr val="lt1"/>
-          </a:fontRef>
-        </p:style>
-        <p:txBody>
-          <a:bodyPr rtlCol="0" anchor="ctr"/>
-          <a:lstStyle/>
-          <a:p>
-            <a:pPr algn="ctr"/>
-          </a:p>
-        </p:txBody>
-      </p:sp>
-      <p:sp>
-        <p:nvSpPr>
-          <p:cNvPr id="5" name="TextBox 4"/>
-          <p:cNvSpPr txBox="1"/>
-          <p:nvPr/>
-        </p:nvSpPr>
-        <p:spPr>
-          <a:xfrm>
-            <a:off x="1115568" y="1490472"/>
-            <a:ext cx="4992624" cy="4133088"/>
-          </a:xfrm>
-          <a:prstGeom prst="rect">
-            <a:avLst/>
-          </a:prstGeom>
-          <a:noFill/>
-        </p:spPr>
-        <p:txBody>
-          <a:bodyPr wrap="square">
-            <a:spAutoFit/>
-          </a:bodyPr>
-          <a:lstStyle/>
-          <a:p>
-            <a:pPr>
-              <a:spcAft>
-                <a:spcPts val="800"/>
-              </a:spcAft>
-            </a:pPr>
-            <a:r>
-              <a:rPr sz="1800" b="1">
-                <a:solidFill>
-                  <a:srgbClr val="1A365D"/>
-                </a:solidFill>
-                <a:latin typeface="Helvetica Neue"/>
-              </a:rPr>
-              <a:t>Patents and Applications</a:t>
-            </a:r>
-          </a:p>
-          <a:p>
-            <a:pPr algn="l">
-              <a:spcAft>
-                <a:spcPts val="500"/>
-              </a:spcAft>
-            </a:pPr>
-            <a:r>
-              <a:rPr sz="1200" b="0">
-                <a:solidFill>
-                  <a:srgbClr val="6B7280"/>
-                </a:solidFill>
-                <a:latin typeface="Helvetica Neue"/>
-              </a:rPr>
-              <a:t>EfficientFormer Vision Transformer — US Patent 12,236,668 (2025)</a:t>
-            </a:r>
-          </a:p>
-          <a:p>
-            <a:pPr algn="l">
-              <a:spcAft>
-                <a:spcPts val="500"/>
-              </a:spcAft>
-            </a:pPr>
-            <a:r>
-              <a:rPr sz="1200" b="0">
-                <a:solidFill>
-                  <a:srgbClr val="6B7280"/>
-                </a:solidFill>
-                <a:latin typeface="Helvetica Neue"/>
-              </a:rPr>
-              <a:t>Text-to-Image Diffusion Model Rearchitecture — US Patent 12,469,273 (2025)</a:t>
-            </a:r>
-          </a:p>
-          <a:p>
-            <a:pPr algn="l">
-              <a:spcAft>
-                <a:spcPts val="500"/>
-              </a:spcAft>
-            </a:pPr>
-            <a:r>
-              <a:rPr sz="1200" b="0">
-                <a:solidFill>
-                  <a:srgbClr val="6B7280"/>
-                </a:solidFill>
-                <a:latin typeface="Helvetica Neue"/>
-              </a:rPr>
-              <a:t>Vision Transformer for MobileNet Size and Speed — US Patent App. 18/080,993</a:t>
-            </a:r>
-          </a:p>
-          <a:p>
-            <a:pPr algn="l">
-              <a:spcAft>
-                <a:spcPts val="500"/>
-              </a:spcAft>
-            </a:pPr>
-            <a:r>
-              <a:rPr sz="1200" b="0">
-                <a:solidFill>
-                  <a:srgbClr val="6B7280"/>
-                </a:solidFill>
-                <a:latin typeface="Helvetica Neue"/>
-              </a:rPr>
-              <a:t>Step Distillation for Latent Diffusion Models — US Patent App. 18/434,411</a:t>
-            </a:r>
-          </a:p>
-          <a:p>
-            <a:pPr algn="l">
-              <a:spcAft>
-                <a:spcPts val="500"/>
-              </a:spcAft>
-            </a:pPr>
-            <a:r>
-              <a:rPr sz="1200" b="0">
-                <a:solidFill>
-                  <a:srgbClr val="6B7280"/>
-                </a:solidFill>
-                <a:latin typeface="Helvetica Neue"/>
-              </a:rPr>
-              <a:t>Automatic Image Generation Using Latent Structural Diffusion — US Patent App. 18/429,251</a:t>
-            </a:r>
-          </a:p>
-        </p:txBody>
-      </p:sp>
-      <p:sp>
-        <p:nvSpPr>
-          <p:cNvPr id="6" name="Rounded Rectangle 5"/>
-          <p:cNvSpPr/>
-          <p:nvPr/>
-        </p:nvSpPr>
-        <p:spPr>
-          <a:xfrm>
-            <a:off x="6492240" y="1325880"/>
-            <a:ext cx="4800600" cy="2057400"/>
-          </a:xfrm>
-          <a:prstGeom prst="roundRect">
-            <a:avLst/>
-          </a:prstGeom>
-          <a:solidFill>
-            <a:srgbClr val="FAFBFD"/>
-          </a:solidFill>
-          <a:ln w="12700">
-            <a:solidFill>
-              <a:srgbClr val="E2E8F0"/>
-            </a:solidFill>
-          </a:ln>
-        </p:spPr>
-        <p:style>
-          <a:lnRef idx="1">
-            <a:schemeClr val="accent1"/>
-          </a:lnRef>
-          <a:fillRef idx="3">
-            <a:schemeClr val="accent1"/>
-          </a:fillRef>
-          <a:effectRef idx="2">
-            <a:schemeClr val="accent1"/>
-          </a:effectRef>
-          <a:fontRef idx="minor">
-            <a:schemeClr val="lt1"/>
-          </a:fontRef>
-        </p:style>
-        <p:txBody>
-          <a:bodyPr rtlCol="0" anchor="ctr"/>
-          <a:lstStyle/>
-          <a:p>
-            <a:pPr algn="ctr"/>
-          </a:p>
-        </p:txBody>
-      </p:sp>
-      <p:sp>
-        <p:nvSpPr>
-          <p:cNvPr id="7" name="TextBox 6"/>
-          <p:cNvSpPr txBox="1"/>
-          <p:nvPr/>
-        </p:nvSpPr>
-        <p:spPr>
-          <a:xfrm>
-            <a:off x="6693408" y="1490472"/>
-            <a:ext cx="4489704" cy="1801368"/>
-          </a:xfrm>
-          <a:prstGeom prst="rect">
-            <a:avLst/>
-          </a:prstGeom>
-          <a:noFill/>
-        </p:spPr>
-        <p:txBody>
-          <a:bodyPr wrap="square">
-            <a:spAutoFit/>
-          </a:bodyPr>
-          <a:lstStyle/>
-          <a:p>
-            <a:pPr>
-              <a:spcAft>
-                <a:spcPts val="800"/>
-              </a:spcAft>
-            </a:pPr>
-            <a:r>
-              <a:rPr sz="1800" b="1">
-                <a:solidFill>
-                  <a:srgbClr val="1A365D"/>
-                </a:solidFill>
-                <a:latin typeface="Helvetica Neue"/>
-              </a:rPr>
-              <a:t>Professional Service</a:t>
-            </a:r>
-          </a:p>
-          <a:p>
-            <a:pPr algn="l">
-              <a:spcAft>
-                <a:spcPts val="500"/>
-              </a:spcAft>
-            </a:pPr>
-            <a:r>
-              <a:rPr sz="1200" b="0">
-                <a:solidFill>
-                  <a:srgbClr val="6B7280"/>
-                </a:solidFill>
-                <a:latin typeface="Helvetica Neue"/>
-              </a:rPr>
-              <a:t>Conference reviewer: NeurIPS, ICCV, ECCV, CVPR, and related venues.</a:t>
-            </a:r>
-          </a:p>
-          <a:p>
-            <a:pPr algn="l">
-              <a:spcAft>
-                <a:spcPts val="500"/>
-              </a:spcAft>
-            </a:pPr>
-            <a:r>
-              <a:rPr sz="1200" b="0">
-                <a:solidFill>
-                  <a:srgbClr val="6B7280"/>
-                </a:solidFill>
-                <a:latin typeface="Helvetica Neue"/>
-              </a:rPr>
-              <a:t>Journal reviewer: IEEE TCAD, IEEE TCAS, and related journals.</a:t>
-            </a:r>
-          </a:p>
-          <a:p>
-            <a:pPr algn="l">
-              <a:spcAft>
-                <a:spcPts val="500"/>
-              </a:spcAft>
-            </a:pPr>
-            <a:r>
-              <a:rPr sz="1200" b="0">
-                <a:solidFill>
-                  <a:srgbClr val="6B7280"/>
-                </a:solidFill>
-                <a:latin typeface="Helvetica Neue"/>
-              </a:rPr>
-              <a:t>Teaching Assistant: Advances in Deep Learning, Northeastern University.</a:t>
-            </a:r>
-          </a:p>
-        </p:txBody>
-      </p:sp>
-      <p:sp>
-        <p:nvSpPr>
-          <p:cNvPr id="8" name="Rounded Rectangle 7"/>
-          <p:cNvSpPr/>
-          <p:nvPr/>
-        </p:nvSpPr>
-        <p:spPr>
-          <a:xfrm>
-            <a:off x="6492240" y="3657600"/>
-            <a:ext cx="4800600" cy="2057400"/>
-          </a:xfrm>
-          <a:prstGeom prst="roundRect">
-            <a:avLst/>
-          </a:prstGeom>
-          <a:solidFill>
-            <a:srgbClr val="FAFBFD"/>
-          </a:solidFill>
-          <a:ln w="12700">
-            <a:solidFill>
-              <a:srgbClr val="E2E8F0"/>
-            </a:solidFill>
-          </a:ln>
-        </p:spPr>
-        <p:style>
-          <a:lnRef idx="1">
-            <a:schemeClr val="accent1"/>
-          </a:lnRef>
-          <a:fillRef idx="3">
-            <a:schemeClr val="accent1"/>
-          </a:fillRef>
-          <a:effectRef idx="2">
-            <a:schemeClr val="accent1"/>
-          </a:effectRef>
-          <a:fontRef idx="minor">
-            <a:schemeClr val="lt1"/>
-          </a:fontRef>
-        </p:style>
-        <p:txBody>
-          <a:bodyPr rtlCol="0" anchor="ctr"/>
-          <a:lstStyle/>
-          <a:p>
-            <a:pPr algn="ctr"/>
-          </a:p>
-        </p:txBody>
-      </p:sp>
-      <p:sp>
-        <p:nvSpPr>
-          <p:cNvPr id="9" name="TextBox 8"/>
-          <p:cNvSpPr txBox="1"/>
-          <p:nvPr/>
-        </p:nvSpPr>
-        <p:spPr>
-          <a:xfrm>
-            <a:off x="6693408" y="3822192"/>
-            <a:ext cx="4489704" cy="1801368"/>
-          </a:xfrm>
-          <a:prstGeom prst="rect">
-            <a:avLst/>
-          </a:prstGeom>
-          <a:noFill/>
-        </p:spPr>
-        <p:txBody>
-          <a:bodyPr wrap="square">
-            <a:spAutoFit/>
-          </a:bodyPr>
-          <a:lstStyle/>
-          <a:p>
-            <a:pPr>
-              <a:spcAft>
-                <a:spcPts val="800"/>
-              </a:spcAft>
-            </a:pPr>
-            <a:r>
-              <a:rPr sz="1800" b="1">
-                <a:solidFill>
-                  <a:srgbClr val="1A365D"/>
-                </a:solidFill>
-                <a:latin typeface="Helvetica Neue"/>
-              </a:rPr>
-              <a:t>Collaboration Interests</a:t>
-            </a:r>
-          </a:p>
-          <a:p>
-            <a:pPr algn="l">
-              <a:spcAft>
-                <a:spcPts val="500"/>
-              </a:spcAft>
-            </a:pPr>
-            <a:r>
-              <a:rPr sz="1200" b="0">
-                <a:solidFill>
-                  <a:srgbClr val="6B7280"/>
-                </a:solidFill>
-                <a:latin typeface="Helvetica Neue"/>
-              </a:rPr>
-              <a:t>Efficient AI and on-device foundation models</a:t>
-            </a:r>
-          </a:p>
-          <a:p>
-            <a:pPr algn="l">
-              <a:spcAft>
-                <a:spcPts val="500"/>
-              </a:spcAft>
-            </a:pPr>
-            <a:r>
-              <a:rPr sz="1200" b="0">
-                <a:solidFill>
-                  <a:srgbClr val="6B7280"/>
-                </a:solidFill>
-                <a:latin typeface="Helvetica Neue"/>
-              </a:rPr>
-              <a:t>Generative vision systems under resource constraints</a:t>
-            </a:r>
-          </a:p>
-          <a:p>
-            <a:pPr algn="l">
-              <a:spcAft>
-                <a:spcPts val="500"/>
-              </a:spcAft>
-            </a:pPr>
-            <a:r>
-              <a:rPr sz="1200" b="0">
-                <a:solidFill>
-                  <a:srgbClr val="6B7280"/>
-                </a:solidFill>
-                <a:latin typeface="Helvetica Neue"/>
-              </a:rPr>
-              <a:t>Hardware-aware model design and acceleration</a:t>
-            </a:r>
-          </a:p>
-        </p:txBody>
-      </p:sp>
-    </p:spTree>
-  </p:cSld>
-  <p:clrMapOvr>
-    <a:masterClrMapping/>
-  </p:clrMapOvr>
-</p:sld>
-</file>
-
-<file path=ppt/slides/slide9.xml><?xml version="1.0" encoding="utf-8"?>
 <p:sld xmlns:a="http://schemas.openxmlformats.org/drawingml/2006/main" xmlns:p="http://schemas.openxmlformats.org/presentationml/2006/main" xmlns:r="http://schemas.openxmlformats.org/officeDocument/2006/relationships">
   <p:cSld>
     <p:bg>
@@ -8278,8 +6704,8 @@
         </p:nvSpPr>
         <p:spPr>
           <a:xfrm>
-            <a:off x="1371600" y="1920240"/>
-            <a:ext cx="9418320" cy="914400"/>
+            <a:off x="1371600" y="1965960"/>
+            <a:ext cx="9326880" cy="868680"/>
           </a:xfrm>
           <a:prstGeom prst="rect">
             <a:avLst/>
@@ -8316,7 +6742,7 @@
                 </a:solidFill>
                 <a:latin typeface="Helvetica Neue"/>
               </a:rPr>
-              <a:t>Open to research collaborations and discussions on efficient AI and generative modeling.</a:t>
+              <a:t>Open to research collaborations and discussions on efficient AI, generative modeling, and mobile deployment.</a:t>
             </a:r>
           </a:p>
           <a:p>
@@ -8332,7 +6758,7 @@
                 </a:solidFill>
                 <a:latin typeface="Helvetica Neue"/>
               </a:rPr>
-              <a:t>yanyu.li@northeastern.edu</a:t>
+              <a:t>li.yanyu@northeastern.edu</a:t>
             </a:r>
           </a:p>
           <a:p>
